--- a/docs/pptx/whole/ritu-scatter-egfr-epi.pptx
+++ b/docs/pptx/whole/ritu-scatter-egfr-epi.pptx
@@ -3371,7 +3371,7 @@
           </p:nvSpPr>
           <p:spPr>
             <a:xfrm>
-              <a:off x="4183756" y="2975903"/>
+              <a:off x="4183758" y="2975905"/>
               <a:ext cx="49651" cy="49651"/>
             </a:xfrm>
             <a:prstGeom prst="ellipse">
@@ -5156,7 +5156,7 @@
           </p:nvSpPr>
           <p:spPr>
             <a:xfrm>
-              <a:off x="3079800" y="3544751"/>
+              <a:off x="4491431" y="3216657"/>
               <a:ext cx="49651" cy="49651"/>
             </a:xfrm>
             <a:prstGeom prst="ellipse">
@@ -5191,7 +5191,7 @@
           </p:nvSpPr>
           <p:spPr>
             <a:xfrm>
-              <a:off x="4491431" y="3216657"/>
+              <a:off x="5487640" y="2984171"/>
               <a:ext cx="49651" cy="49651"/>
             </a:xfrm>
             <a:prstGeom prst="ellipse">
@@ -5226,7 +5226,7 @@
           </p:nvSpPr>
           <p:spPr>
             <a:xfrm>
-              <a:off x="5487640" y="2984171"/>
+              <a:off x="4145684" y="2690895"/>
               <a:ext cx="49651" cy="49651"/>
             </a:xfrm>
             <a:prstGeom prst="ellipse">
@@ -5261,7 +5261,7 @@
           </p:nvSpPr>
           <p:spPr>
             <a:xfrm>
-              <a:off x="4145684" y="2690895"/>
+              <a:off x="3642330" y="3437975"/>
               <a:ext cx="49651" cy="49651"/>
             </a:xfrm>
             <a:prstGeom prst="ellipse">
@@ -5296,7 +5296,7 @@
           </p:nvSpPr>
           <p:spPr>
             <a:xfrm>
-              <a:off x="3642330" y="3437975"/>
+              <a:off x="5064734" y="2541438"/>
               <a:ext cx="49651" cy="49651"/>
             </a:xfrm>
             <a:prstGeom prst="ellipse">
@@ -5331,7 +5331,7 @@
           </p:nvSpPr>
           <p:spPr>
             <a:xfrm>
-              <a:off x="5064734" y="2541438"/>
+              <a:off x="6214024" y="2624906"/>
               <a:ext cx="49651" cy="49651"/>
             </a:xfrm>
             <a:prstGeom prst="ellipse">
@@ -5366,7 +5366,7 @@
           </p:nvSpPr>
           <p:spPr>
             <a:xfrm>
-              <a:off x="6214024" y="2624906"/>
+              <a:off x="5302894" y="3166982"/>
               <a:ext cx="49651" cy="49651"/>
             </a:xfrm>
             <a:prstGeom prst="ellipse">
@@ -5401,7 +5401,7 @@
           </p:nvSpPr>
           <p:spPr>
             <a:xfrm>
-              <a:off x="5302894" y="3166982"/>
+              <a:off x="3352855" y="3422156"/>
               <a:ext cx="49651" cy="49651"/>
             </a:xfrm>
             <a:prstGeom prst="ellipse">
@@ -5436,7 +5436,7 @@
           </p:nvSpPr>
           <p:spPr>
             <a:xfrm>
-              <a:off x="3352855" y="3422156"/>
+              <a:off x="3115196" y="2421276"/>
               <a:ext cx="49651" cy="49651"/>
             </a:xfrm>
             <a:prstGeom prst="ellipse">
@@ -5471,7 +5471,7 @@
           </p:nvSpPr>
           <p:spPr>
             <a:xfrm>
-              <a:off x="3115196" y="2421276"/>
+              <a:off x="5916089" y="2342755"/>
               <a:ext cx="49651" cy="49651"/>
             </a:xfrm>
             <a:prstGeom prst="ellipse">
@@ -5506,7 +5506,7 @@
           </p:nvSpPr>
           <p:spPr>
             <a:xfrm>
-              <a:off x="5916089" y="2342755"/>
+              <a:off x="5854882" y="3071300"/>
               <a:ext cx="49651" cy="49651"/>
             </a:xfrm>
             <a:prstGeom prst="ellipse">
@@ -5541,7 +5541,7 @@
           </p:nvSpPr>
           <p:spPr>
             <a:xfrm>
-              <a:off x="5854882" y="3071300"/>
+              <a:off x="4680211" y="2528169"/>
               <a:ext cx="49651" cy="49651"/>
             </a:xfrm>
             <a:prstGeom prst="ellipse">
@@ -5576,7 +5576,7 @@
           </p:nvSpPr>
           <p:spPr>
             <a:xfrm>
-              <a:off x="4680211" y="2528169"/>
+              <a:off x="4947038" y="3002997"/>
               <a:ext cx="49651" cy="49651"/>
             </a:xfrm>
             <a:prstGeom prst="ellipse">
@@ -5611,7 +5611,7 @@
           </p:nvSpPr>
           <p:spPr>
             <a:xfrm>
-              <a:off x="4947038" y="3002997"/>
+              <a:off x="3785364" y="2795464"/>
               <a:ext cx="49651" cy="49651"/>
             </a:xfrm>
             <a:prstGeom prst="ellipse">
@@ -5646,7 +5646,7 @@
           </p:nvSpPr>
           <p:spPr>
             <a:xfrm>
-              <a:off x="3785364" y="2795464"/>
+              <a:off x="4444841" y="2394413"/>
               <a:ext cx="49651" cy="49651"/>
             </a:xfrm>
             <a:prstGeom prst="ellipse">
@@ -5681,7 +5681,7 @@
           </p:nvSpPr>
           <p:spPr>
             <a:xfrm>
-              <a:off x="4444841" y="2394413"/>
+              <a:off x="5822305" y="3289348"/>
               <a:ext cx="49651" cy="49651"/>
             </a:xfrm>
             <a:prstGeom prst="ellipse">
@@ -5716,7 +5716,7 @@
           </p:nvSpPr>
           <p:spPr>
             <a:xfrm>
-              <a:off x="5822305" y="3289348"/>
+              <a:off x="5484406" y="3515345"/>
               <a:ext cx="49651" cy="49651"/>
             </a:xfrm>
             <a:prstGeom prst="ellipse">
@@ -5751,7 +5751,7 @@
           </p:nvSpPr>
           <p:spPr>
             <a:xfrm>
-              <a:off x="5484406" y="3515345"/>
+              <a:off x="4510743" y="2700140"/>
               <a:ext cx="49651" cy="49651"/>
             </a:xfrm>
             <a:prstGeom prst="ellipse">
@@ -5786,7 +5786,7 @@
           </p:nvSpPr>
           <p:spPr>
             <a:xfrm>
-              <a:off x="4510743" y="2700140"/>
+              <a:off x="4255922" y="3782909"/>
               <a:ext cx="49651" cy="49651"/>
             </a:xfrm>
             <a:prstGeom prst="ellipse">
@@ -5821,7 +5821,7 @@
           </p:nvSpPr>
           <p:spPr>
             <a:xfrm>
-              <a:off x="4255922" y="3782909"/>
+              <a:off x="6201373" y="2323713"/>
               <a:ext cx="49651" cy="49651"/>
             </a:xfrm>
             <a:prstGeom prst="ellipse">
@@ -5856,7 +5856,7 @@
           </p:nvSpPr>
           <p:spPr>
             <a:xfrm>
-              <a:off x="6201373" y="2323713"/>
+              <a:off x="4577406" y="2709721"/>
               <a:ext cx="49651" cy="49651"/>
             </a:xfrm>
             <a:prstGeom prst="ellipse">
@@ -5891,7 +5891,7 @@
           </p:nvSpPr>
           <p:spPr>
             <a:xfrm>
-              <a:off x="4577406" y="2709721"/>
+              <a:off x="5251014" y="2645210"/>
               <a:ext cx="49651" cy="49651"/>
             </a:xfrm>
             <a:prstGeom prst="ellipse">
@@ -5926,7 +5926,7 @@
           </p:nvSpPr>
           <p:spPr>
             <a:xfrm>
-              <a:off x="5251014" y="2645210"/>
+              <a:off x="3376062" y="2862629"/>
               <a:ext cx="49651" cy="49651"/>
             </a:xfrm>
             <a:prstGeom prst="ellipse">
@@ -5961,7 +5961,7 @@
           </p:nvSpPr>
           <p:spPr>
             <a:xfrm>
-              <a:off x="3376062" y="2862629"/>
+              <a:off x="5251973" y="3151700"/>
               <a:ext cx="49651" cy="49651"/>
             </a:xfrm>
             <a:prstGeom prst="ellipse">
@@ -5996,7 +5996,7 @@
           </p:nvSpPr>
           <p:spPr>
             <a:xfrm>
-              <a:off x="5251973" y="3151700"/>
+              <a:off x="2621091" y="2972130"/>
               <a:ext cx="49651" cy="49651"/>
             </a:xfrm>
             <a:prstGeom prst="ellipse">
@@ -6031,7 +6031,7 @@
           </p:nvSpPr>
           <p:spPr>
             <a:xfrm>
-              <a:off x="2621091" y="2972130"/>
+              <a:off x="5945201" y="3227918"/>
               <a:ext cx="49651" cy="49651"/>
             </a:xfrm>
             <a:prstGeom prst="ellipse">
@@ -6066,7 +6066,7 @@
           </p:nvSpPr>
           <p:spPr>
             <a:xfrm>
-              <a:off x="5945201" y="3227918"/>
+              <a:off x="7395443" y="3441390"/>
               <a:ext cx="49651" cy="49651"/>
             </a:xfrm>
             <a:prstGeom prst="ellipse">
@@ -6101,7 +6101,7 @@
           </p:nvSpPr>
           <p:spPr>
             <a:xfrm>
-              <a:off x="7395443" y="3441390"/>
+              <a:off x="4146331" y="2705807"/>
               <a:ext cx="49651" cy="49651"/>
             </a:xfrm>
             <a:prstGeom prst="ellipse">
@@ -6136,7 +6136,7 @@
           </p:nvSpPr>
           <p:spPr>
             <a:xfrm>
-              <a:off x="4146331" y="2705807"/>
+              <a:off x="5059914" y="2730385"/>
               <a:ext cx="49651" cy="49651"/>
             </a:xfrm>
             <a:prstGeom prst="ellipse">
@@ -6171,7 +6171,7 @@
           </p:nvSpPr>
           <p:spPr>
             <a:xfrm>
-              <a:off x="5059914" y="2730385"/>
+              <a:off x="4225097" y="2974574"/>
               <a:ext cx="49651" cy="49651"/>
             </a:xfrm>
             <a:prstGeom prst="ellipse">
@@ -6206,7 +6206,7 @@
           </p:nvSpPr>
           <p:spPr>
             <a:xfrm>
-              <a:off x="4225097" y="2974574"/>
+              <a:off x="4112310" y="3314701"/>
               <a:ext cx="49651" cy="49651"/>
             </a:xfrm>
             <a:prstGeom prst="ellipse">
@@ -6241,7 +6241,7 @@
           </p:nvSpPr>
           <p:spPr>
             <a:xfrm>
-              <a:off x="4112310" y="3314701"/>
+              <a:off x="4777450" y="2388882"/>
               <a:ext cx="49651" cy="49651"/>
             </a:xfrm>
             <a:prstGeom prst="ellipse">
@@ -6276,7 +6276,7 @@
           </p:nvSpPr>
           <p:spPr>
             <a:xfrm>
-              <a:off x="4777450" y="2388882"/>
+              <a:off x="5422288" y="2540184"/>
               <a:ext cx="49651" cy="49651"/>
             </a:xfrm>
             <a:prstGeom prst="ellipse">
@@ -6311,7 +6311,7 @@
           </p:nvSpPr>
           <p:spPr>
             <a:xfrm>
-              <a:off x="5422288" y="2540184"/>
+              <a:off x="5968456" y="3111498"/>
               <a:ext cx="49651" cy="49651"/>
             </a:xfrm>
             <a:prstGeom prst="ellipse">
@@ -6346,7 +6346,7 @@
           </p:nvSpPr>
           <p:spPr>
             <a:xfrm>
-              <a:off x="5968456" y="3111498"/>
+              <a:off x="4228121" y="2553546"/>
               <a:ext cx="49651" cy="49651"/>
             </a:xfrm>
             <a:prstGeom prst="ellipse">
@@ -6381,7 +6381,7 @@
           </p:nvSpPr>
           <p:spPr>
             <a:xfrm>
-              <a:off x="4228121" y="2553546"/>
+              <a:off x="4927549" y="2349255"/>
               <a:ext cx="49651" cy="49651"/>
             </a:xfrm>
             <a:prstGeom prst="ellipse">
@@ -6416,7 +6416,7 @@
           </p:nvSpPr>
           <p:spPr>
             <a:xfrm>
-              <a:off x="4927549" y="2349255"/>
+              <a:off x="3767037" y="2942043"/>
               <a:ext cx="49651" cy="49651"/>
             </a:xfrm>
             <a:prstGeom prst="ellipse">
@@ -6451,7 +6451,7 @@
           </p:nvSpPr>
           <p:spPr>
             <a:xfrm>
-              <a:off x="3767037" y="2942043"/>
+              <a:off x="5841589" y="3244757"/>
               <a:ext cx="49651" cy="49651"/>
             </a:xfrm>
             <a:prstGeom prst="ellipse">
@@ -6486,7 +6486,7 @@
           </p:nvSpPr>
           <p:spPr>
             <a:xfrm>
-              <a:off x="5841589" y="3244757"/>
+              <a:off x="4270097" y="3354859"/>
               <a:ext cx="49651" cy="49651"/>
             </a:xfrm>
             <a:prstGeom prst="ellipse">
@@ -6521,7 +6521,7 @@
           </p:nvSpPr>
           <p:spPr>
             <a:xfrm>
-              <a:off x="4270097" y="3354859"/>
+              <a:off x="6681409" y="2412725"/>
               <a:ext cx="49651" cy="49651"/>
             </a:xfrm>
             <a:prstGeom prst="ellipse">
@@ -6556,7 +6556,7 @@
           </p:nvSpPr>
           <p:spPr>
             <a:xfrm>
-              <a:off x="6681409" y="2412725"/>
+              <a:off x="3911277" y="3404985"/>
               <a:ext cx="49651" cy="49651"/>
             </a:xfrm>
             <a:prstGeom prst="ellipse">
@@ -6591,7 +6591,7 @@
           </p:nvSpPr>
           <p:spPr>
             <a:xfrm>
-              <a:off x="3911277" y="3404985"/>
+              <a:off x="6053297" y="2887912"/>
               <a:ext cx="49651" cy="49651"/>
             </a:xfrm>
             <a:prstGeom prst="ellipse">
@@ -6626,7 +6626,7 @@
           </p:nvSpPr>
           <p:spPr>
             <a:xfrm>
-              <a:off x="6053297" y="2887912"/>
+              <a:off x="6100746" y="3086362"/>
               <a:ext cx="49651" cy="49651"/>
             </a:xfrm>
             <a:prstGeom prst="ellipse">
@@ -6661,7 +6661,7 @@
           </p:nvSpPr>
           <p:spPr>
             <a:xfrm>
-              <a:off x="6100746" y="3086362"/>
+              <a:off x="6009019" y="2045672"/>
               <a:ext cx="49651" cy="49651"/>
             </a:xfrm>
             <a:prstGeom prst="ellipse">
@@ -6696,7 +6696,7 @@
           </p:nvSpPr>
           <p:spPr>
             <a:xfrm>
-              <a:off x="6009019" y="2045672"/>
+              <a:off x="5367343" y="2461511"/>
               <a:ext cx="49651" cy="49651"/>
             </a:xfrm>
             <a:prstGeom prst="ellipse">
@@ -6731,7 +6731,7 @@
           </p:nvSpPr>
           <p:spPr>
             <a:xfrm>
-              <a:off x="5367343" y="2461511"/>
+              <a:off x="7834534" y="4695358"/>
               <a:ext cx="49651" cy="49651"/>
             </a:xfrm>
             <a:prstGeom prst="ellipse">
@@ -6766,7 +6766,7 @@
           </p:nvSpPr>
           <p:spPr>
             <a:xfrm>
-              <a:off x="7834534" y="4695358"/>
+              <a:off x="2524836" y="3181001"/>
               <a:ext cx="49651" cy="49651"/>
             </a:xfrm>
             <a:prstGeom prst="ellipse">
@@ -6801,7 +6801,7 @@
           </p:nvSpPr>
           <p:spPr>
             <a:xfrm>
-              <a:off x="2524836" y="3181001"/>
+              <a:off x="2199189" y="3105262"/>
               <a:ext cx="49651" cy="49651"/>
             </a:xfrm>
             <a:prstGeom prst="ellipse">
@@ -6836,7 +6836,7 @@
           </p:nvSpPr>
           <p:spPr>
             <a:xfrm>
-              <a:off x="2199189" y="3105262"/>
+              <a:off x="4295460" y="2885384"/>
               <a:ext cx="49651" cy="49651"/>
             </a:xfrm>
             <a:prstGeom prst="ellipse">
@@ -6871,7 +6871,7 @@
           </p:nvSpPr>
           <p:spPr>
             <a:xfrm>
-              <a:off x="4295460" y="2885384"/>
+              <a:off x="7606909" y="2720762"/>
               <a:ext cx="49651" cy="49651"/>
             </a:xfrm>
             <a:prstGeom prst="ellipse">
@@ -6906,7 +6906,7 @@
           </p:nvSpPr>
           <p:spPr>
             <a:xfrm>
-              <a:off x="7606909" y="2720762"/>
+              <a:off x="4917002" y="2463996"/>
               <a:ext cx="49651" cy="49651"/>
             </a:xfrm>
             <a:prstGeom prst="ellipse">
@@ -6941,7 +6941,7 @@
           </p:nvSpPr>
           <p:spPr>
             <a:xfrm>
-              <a:off x="4917002" y="2463996"/>
+              <a:off x="5240122" y="3352136"/>
               <a:ext cx="49651" cy="49651"/>
             </a:xfrm>
             <a:prstGeom prst="ellipse">
@@ -6976,7 +6976,7 @@
           </p:nvSpPr>
           <p:spPr>
             <a:xfrm>
-              <a:off x="5240122" y="3352136"/>
+              <a:off x="6518997" y="3080232"/>
               <a:ext cx="49651" cy="49651"/>
             </a:xfrm>
             <a:prstGeom prst="ellipse">
@@ -7011,7 +7011,7 @@
           </p:nvSpPr>
           <p:spPr>
             <a:xfrm>
-              <a:off x="6518997" y="3080232"/>
+              <a:off x="5401534" y="3398673"/>
               <a:ext cx="49651" cy="49651"/>
             </a:xfrm>
             <a:prstGeom prst="ellipse">
@@ -7046,7 +7046,7 @@
           </p:nvSpPr>
           <p:spPr>
             <a:xfrm>
-              <a:off x="5401534" y="3398673"/>
+              <a:off x="2282694" y="3126117"/>
               <a:ext cx="49651" cy="49651"/>
             </a:xfrm>
             <a:prstGeom prst="ellipse">
@@ -7081,7 +7081,7 @@
           </p:nvSpPr>
           <p:spPr>
             <a:xfrm>
-              <a:off x="2282694" y="3126117"/>
+              <a:off x="5386599" y="3327691"/>
               <a:ext cx="49651" cy="49651"/>
             </a:xfrm>
             <a:prstGeom prst="ellipse">
@@ -7116,7 +7116,7 @@
           </p:nvSpPr>
           <p:spPr>
             <a:xfrm>
-              <a:off x="5386599" y="3327691"/>
+              <a:off x="6393522" y="2980916"/>
               <a:ext cx="49651" cy="49651"/>
             </a:xfrm>
             <a:prstGeom prst="ellipse">
@@ -7151,7 +7151,7 @@
           </p:nvSpPr>
           <p:spPr>
             <a:xfrm>
-              <a:off x="6393522" y="2980916"/>
+              <a:off x="4927991" y="2968208"/>
               <a:ext cx="49651" cy="49651"/>
             </a:xfrm>
             <a:prstGeom prst="ellipse">
@@ -7186,7 +7186,7 @@
           </p:nvSpPr>
           <p:spPr>
             <a:xfrm>
-              <a:off x="4927991" y="2968208"/>
+              <a:off x="5468223" y="3609728"/>
               <a:ext cx="49651" cy="49651"/>
             </a:xfrm>
             <a:prstGeom prst="ellipse">
@@ -7221,7 +7221,7 @@
           </p:nvSpPr>
           <p:spPr>
             <a:xfrm>
-              <a:off x="5468223" y="3609728"/>
+              <a:off x="3982631" y="2898570"/>
               <a:ext cx="49651" cy="49651"/>
             </a:xfrm>
             <a:prstGeom prst="ellipse">
@@ -7256,7 +7256,7 @@
           </p:nvSpPr>
           <p:spPr>
             <a:xfrm>
-              <a:off x="3982631" y="2898570"/>
+              <a:off x="5036536" y="3611033"/>
               <a:ext cx="49651" cy="49651"/>
             </a:xfrm>
             <a:prstGeom prst="ellipse">
@@ -7291,7 +7291,7 @@
           </p:nvSpPr>
           <p:spPr>
             <a:xfrm>
-              <a:off x="5036536" y="3611033"/>
+              <a:off x="4178236" y="3304484"/>
               <a:ext cx="49651" cy="49651"/>
             </a:xfrm>
             <a:prstGeom prst="ellipse">
@@ -7326,7 +7326,7 @@
           </p:nvSpPr>
           <p:spPr>
             <a:xfrm>
-              <a:off x="4178236" y="3304484"/>
+              <a:off x="3592566" y="2815520"/>
               <a:ext cx="49651" cy="49651"/>
             </a:xfrm>
             <a:prstGeom prst="ellipse">
@@ -7361,7 +7361,7 @@
           </p:nvSpPr>
           <p:spPr>
             <a:xfrm>
-              <a:off x="3592566" y="2815520"/>
+              <a:off x="4356504" y="2456376"/>
               <a:ext cx="49651" cy="49651"/>
             </a:xfrm>
             <a:prstGeom prst="ellipse">
@@ -7396,7 +7396,7 @@
           </p:nvSpPr>
           <p:spPr>
             <a:xfrm>
-              <a:off x="4356504" y="2456376"/>
+              <a:off x="4565936" y="3323390"/>
               <a:ext cx="49651" cy="49651"/>
             </a:xfrm>
             <a:prstGeom prst="ellipse">
@@ -7431,7 +7431,7 @@
           </p:nvSpPr>
           <p:spPr>
             <a:xfrm>
-              <a:off x="4565936" y="3323390"/>
+              <a:off x="4181441" y="4066193"/>
               <a:ext cx="49651" cy="49651"/>
             </a:xfrm>
             <a:prstGeom prst="ellipse">
@@ -7466,7 +7466,7 @@
           </p:nvSpPr>
           <p:spPr>
             <a:xfrm>
-              <a:off x="4181441" y="4066193"/>
+              <a:off x="5606317" y="2941406"/>
               <a:ext cx="49651" cy="49651"/>
             </a:xfrm>
             <a:prstGeom prst="ellipse">
@@ -7501,7 +7501,7 @@
           </p:nvSpPr>
           <p:spPr>
             <a:xfrm>
-              <a:off x="5606317" y="2941406"/>
+              <a:off x="3703170" y="3189776"/>
               <a:ext cx="49651" cy="49651"/>
             </a:xfrm>
             <a:prstGeom prst="ellipse">
@@ -7536,7 +7536,7 @@
           </p:nvSpPr>
           <p:spPr>
             <a:xfrm>
-              <a:off x="3703170" y="3189776"/>
+              <a:off x="3528886" y="3116647"/>
               <a:ext cx="49651" cy="49651"/>
             </a:xfrm>
             <a:prstGeom prst="ellipse">
@@ -7571,7 +7571,7 @@
           </p:nvSpPr>
           <p:spPr>
             <a:xfrm>
-              <a:off x="3528886" y="3116647"/>
+              <a:off x="7516197" y="4179142"/>
               <a:ext cx="49651" cy="49651"/>
             </a:xfrm>
             <a:prstGeom prst="ellipse">
@@ -7606,7 +7606,7 @@
           </p:nvSpPr>
           <p:spPr>
             <a:xfrm>
-              <a:off x="7516197" y="4179142"/>
+              <a:off x="5619265" y="3181787"/>
               <a:ext cx="49651" cy="49651"/>
             </a:xfrm>
             <a:prstGeom prst="ellipse">
@@ -7641,7 +7641,7 @@
           </p:nvSpPr>
           <p:spPr>
             <a:xfrm>
-              <a:off x="5619265" y="3181787"/>
+              <a:off x="5019974" y="2560785"/>
               <a:ext cx="49651" cy="49651"/>
             </a:xfrm>
             <a:prstGeom prst="ellipse">
@@ -7676,7 +7676,7 @@
           </p:nvSpPr>
           <p:spPr>
             <a:xfrm>
-              <a:off x="5019974" y="2560785"/>
+              <a:off x="6650963" y="2347693"/>
               <a:ext cx="49651" cy="49651"/>
             </a:xfrm>
             <a:prstGeom prst="ellipse">
@@ -7711,7 +7711,7 @@
           </p:nvSpPr>
           <p:spPr>
             <a:xfrm>
-              <a:off x="6650963" y="2347693"/>
+              <a:off x="3933285" y="2933790"/>
               <a:ext cx="49651" cy="49651"/>
             </a:xfrm>
             <a:prstGeom prst="ellipse">
@@ -7746,7 +7746,7 @@
           </p:nvSpPr>
           <p:spPr>
             <a:xfrm>
-              <a:off x="3933285" y="2933790"/>
+              <a:off x="5768352" y="2581935"/>
               <a:ext cx="49651" cy="49651"/>
             </a:xfrm>
             <a:prstGeom prst="ellipse">
@@ -7781,7 +7781,7 @@
           </p:nvSpPr>
           <p:spPr>
             <a:xfrm>
-              <a:off x="5768352" y="2581935"/>
+              <a:off x="1950408" y="3120334"/>
               <a:ext cx="49651" cy="49651"/>
             </a:xfrm>
             <a:prstGeom prst="ellipse">
@@ -7816,7 +7816,7 @@
           </p:nvSpPr>
           <p:spPr>
             <a:xfrm>
-              <a:off x="1950408" y="3120334"/>
+              <a:off x="4411761" y="2941456"/>
               <a:ext cx="49651" cy="49651"/>
             </a:xfrm>
             <a:prstGeom prst="ellipse">
@@ -7851,7 +7851,7 @@
           </p:nvSpPr>
           <p:spPr>
             <a:xfrm>
-              <a:off x="4411761" y="2941456"/>
+              <a:off x="5224740" y="2975585"/>
               <a:ext cx="49651" cy="49651"/>
             </a:xfrm>
             <a:prstGeom prst="ellipse">
@@ -7886,7 +7886,7 @@
           </p:nvSpPr>
           <p:spPr>
             <a:xfrm>
-              <a:off x="5224740" y="2975585"/>
+              <a:off x="4755091" y="3416445"/>
               <a:ext cx="49651" cy="49651"/>
             </a:xfrm>
             <a:prstGeom prst="ellipse">
@@ -7921,7 +7921,7 @@
           </p:nvSpPr>
           <p:spPr>
             <a:xfrm>
-              <a:off x="4755091" y="3416445"/>
+              <a:off x="2231745" y="3570614"/>
               <a:ext cx="49651" cy="49651"/>
             </a:xfrm>
             <a:prstGeom prst="ellipse">
@@ -7956,7 +7956,7 @@
           </p:nvSpPr>
           <p:spPr>
             <a:xfrm>
-              <a:off x="2231745" y="3570614"/>
+              <a:off x="7840805" y="3130475"/>
               <a:ext cx="49651" cy="49651"/>
             </a:xfrm>
             <a:prstGeom prst="ellipse">
@@ -7991,7 +7991,7 @@
           </p:nvSpPr>
           <p:spPr>
             <a:xfrm>
-              <a:off x="7840805" y="3130475"/>
+              <a:off x="5248143" y="2170824"/>
               <a:ext cx="49651" cy="49651"/>
             </a:xfrm>
             <a:prstGeom prst="ellipse">
@@ -8026,7 +8026,7 @@
           </p:nvSpPr>
           <p:spPr>
             <a:xfrm>
-              <a:off x="5248143" y="2170824"/>
+              <a:off x="3940783" y="3590707"/>
               <a:ext cx="49651" cy="49651"/>
             </a:xfrm>
             <a:prstGeom prst="ellipse">
@@ -8061,7 +8061,7 @@
           </p:nvSpPr>
           <p:spPr>
             <a:xfrm>
-              <a:off x="3940783" y="3590707"/>
+              <a:off x="5480300" y="3063565"/>
               <a:ext cx="49651" cy="49651"/>
             </a:xfrm>
             <a:prstGeom prst="ellipse">
@@ -8096,7 +8096,7 @@
           </p:nvSpPr>
           <p:spPr>
             <a:xfrm>
-              <a:off x="5480300" y="3063565"/>
+              <a:off x="4846897" y="2558726"/>
               <a:ext cx="49651" cy="49651"/>
             </a:xfrm>
             <a:prstGeom prst="ellipse">
@@ -8131,7 +8131,7 @@
           </p:nvSpPr>
           <p:spPr>
             <a:xfrm>
-              <a:off x="4846897" y="2558726"/>
+              <a:off x="4666664" y="2480870"/>
               <a:ext cx="49651" cy="49651"/>
             </a:xfrm>
             <a:prstGeom prst="ellipse">
@@ -8166,7 +8166,7 @@
           </p:nvSpPr>
           <p:spPr>
             <a:xfrm>
-              <a:off x="4666664" y="2480870"/>
+              <a:off x="5452570" y="3362381"/>
               <a:ext cx="49651" cy="49651"/>
             </a:xfrm>
             <a:prstGeom prst="ellipse">
@@ -8201,7 +8201,7 @@
           </p:nvSpPr>
           <p:spPr>
             <a:xfrm>
-              <a:off x="5452570" y="3362381"/>
+              <a:off x="3815202" y="2475866"/>
               <a:ext cx="49651" cy="49651"/>
             </a:xfrm>
             <a:prstGeom prst="ellipse">
@@ -8236,7 +8236,7 @@
           </p:nvSpPr>
           <p:spPr>
             <a:xfrm>
-              <a:off x="3815202" y="2475866"/>
+              <a:off x="4400793" y="3278255"/>
               <a:ext cx="49651" cy="49651"/>
             </a:xfrm>
             <a:prstGeom prst="ellipse">
@@ -8271,7 +8271,7 @@
           </p:nvSpPr>
           <p:spPr>
             <a:xfrm>
-              <a:off x="4400793" y="3278255"/>
+              <a:off x="4643227" y="2543903"/>
               <a:ext cx="49651" cy="49651"/>
             </a:xfrm>
             <a:prstGeom prst="ellipse">
@@ -8306,7 +8306,7 @@
           </p:nvSpPr>
           <p:spPr>
             <a:xfrm>
-              <a:off x="4643227" y="2543903"/>
+              <a:off x="7152179" y="3448555"/>
               <a:ext cx="49651" cy="49651"/>
             </a:xfrm>
             <a:prstGeom prst="ellipse">
@@ -8341,7 +8341,7 @@
           </p:nvSpPr>
           <p:spPr>
             <a:xfrm>
-              <a:off x="7152179" y="3448555"/>
+              <a:off x="5460202" y="3244318"/>
               <a:ext cx="49651" cy="49651"/>
             </a:xfrm>
             <a:prstGeom prst="ellipse">
@@ -8376,7 +8376,7 @@
           </p:nvSpPr>
           <p:spPr>
             <a:xfrm>
-              <a:off x="5460202" y="3244318"/>
+              <a:off x="5051016" y="2604854"/>
               <a:ext cx="49651" cy="49651"/>
             </a:xfrm>
             <a:prstGeom prst="ellipse">
@@ -8411,7 +8411,7 @@
           </p:nvSpPr>
           <p:spPr>
             <a:xfrm>
-              <a:off x="5051016" y="2604854"/>
+              <a:off x="7456423" y="2961012"/>
               <a:ext cx="49651" cy="49651"/>
             </a:xfrm>
             <a:prstGeom prst="ellipse">
@@ -8446,7 +8446,7 @@
           </p:nvSpPr>
           <p:spPr>
             <a:xfrm>
-              <a:off x="7456423" y="2961012"/>
+              <a:off x="3674615" y="2716743"/>
               <a:ext cx="49651" cy="49651"/>
             </a:xfrm>
             <a:prstGeom prst="ellipse">
@@ -8481,7 +8481,7 @@
           </p:nvSpPr>
           <p:spPr>
             <a:xfrm>
-              <a:off x="3674615" y="2716743"/>
+              <a:off x="5002051" y="2731242"/>
               <a:ext cx="49651" cy="49651"/>
             </a:xfrm>
             <a:prstGeom prst="ellipse">
@@ -8516,7 +8516,7 @@
           </p:nvSpPr>
           <p:spPr>
             <a:xfrm>
-              <a:off x="5002051" y="2731242"/>
+              <a:off x="6541246" y="2360931"/>
               <a:ext cx="49651" cy="49651"/>
             </a:xfrm>
             <a:prstGeom prst="ellipse">
@@ -8551,7 +8551,7 @@
           </p:nvSpPr>
           <p:spPr>
             <a:xfrm>
-              <a:off x="6541246" y="2360931"/>
+              <a:off x="6582105" y="2706051"/>
               <a:ext cx="49651" cy="49651"/>
             </a:xfrm>
             <a:prstGeom prst="ellipse">
@@ -8586,7 +8586,7 @@
           </p:nvSpPr>
           <p:spPr>
             <a:xfrm>
-              <a:off x="6582105" y="2706051"/>
+              <a:off x="5242628" y="3724351"/>
               <a:ext cx="49651" cy="49651"/>
             </a:xfrm>
             <a:prstGeom prst="ellipse">
@@ -8621,7 +8621,7 @@
           </p:nvSpPr>
           <p:spPr>
             <a:xfrm>
-              <a:off x="5242628" y="3724351"/>
+              <a:off x="5197761" y="2174034"/>
               <a:ext cx="49651" cy="49651"/>
             </a:xfrm>
             <a:prstGeom prst="ellipse">
@@ -8656,7 +8656,7 @@
           </p:nvSpPr>
           <p:spPr>
             <a:xfrm>
-              <a:off x="5197761" y="2174034"/>
+              <a:off x="5598111" y="3415336"/>
               <a:ext cx="49651" cy="49651"/>
             </a:xfrm>
             <a:prstGeom prst="ellipse">
@@ -8691,7 +8691,7 @@
           </p:nvSpPr>
           <p:spPr>
             <a:xfrm>
-              <a:off x="5598111" y="3415336"/>
+              <a:off x="6462354" y="2722141"/>
               <a:ext cx="49651" cy="49651"/>
             </a:xfrm>
             <a:prstGeom prst="ellipse">
@@ -8726,7 +8726,7 @@
           </p:nvSpPr>
           <p:spPr>
             <a:xfrm>
-              <a:off x="6462354" y="2722141"/>
+              <a:off x="5255078" y="3077879"/>
               <a:ext cx="49651" cy="49651"/>
             </a:xfrm>
             <a:prstGeom prst="ellipse">
@@ -8761,7 +8761,7 @@
           </p:nvSpPr>
           <p:spPr>
             <a:xfrm>
-              <a:off x="5255078" y="3077879"/>
+              <a:off x="5449138" y="5177120"/>
               <a:ext cx="49651" cy="49651"/>
             </a:xfrm>
             <a:prstGeom prst="ellipse">
@@ -8796,7 +8796,7 @@
           </p:nvSpPr>
           <p:spPr>
             <a:xfrm>
-              <a:off x="5449138" y="5177120"/>
+              <a:off x="6846499" y="2806920"/>
               <a:ext cx="49651" cy="49651"/>
             </a:xfrm>
             <a:prstGeom prst="ellipse">
@@ -8831,7 +8831,7 @@
           </p:nvSpPr>
           <p:spPr>
             <a:xfrm>
-              <a:off x="6846499" y="2806920"/>
+              <a:off x="7418369" y="4009078"/>
               <a:ext cx="49651" cy="49651"/>
             </a:xfrm>
             <a:prstGeom prst="ellipse">
@@ -8866,7 +8866,7 @@
           </p:nvSpPr>
           <p:spPr>
             <a:xfrm>
-              <a:off x="7418369" y="4009078"/>
+              <a:off x="6103604" y="2850041"/>
               <a:ext cx="49651" cy="49651"/>
             </a:xfrm>
             <a:prstGeom prst="ellipse">
@@ -8901,7 +8901,7 @@
           </p:nvSpPr>
           <p:spPr>
             <a:xfrm>
-              <a:off x="6103604" y="2850041"/>
+              <a:off x="6029408" y="2694632"/>
               <a:ext cx="49651" cy="49651"/>
             </a:xfrm>
             <a:prstGeom prst="ellipse">
@@ -8936,7 +8936,7 @@
           </p:nvSpPr>
           <p:spPr>
             <a:xfrm>
-              <a:off x="6029408" y="2694632"/>
+              <a:off x="3713365" y="4693964"/>
               <a:ext cx="49651" cy="49651"/>
             </a:xfrm>
             <a:prstGeom prst="ellipse">
@@ -8971,7 +8971,7 @@
           </p:nvSpPr>
           <p:spPr>
             <a:xfrm>
-              <a:off x="3713365" y="4693964"/>
+              <a:off x="2823373" y="2859926"/>
               <a:ext cx="49651" cy="49651"/>
             </a:xfrm>
             <a:prstGeom prst="ellipse">
@@ -9006,7 +9006,7 @@
           </p:nvSpPr>
           <p:spPr>
             <a:xfrm>
-              <a:off x="2823373" y="2859926"/>
+              <a:off x="5059403" y="2524593"/>
               <a:ext cx="49651" cy="49651"/>
             </a:xfrm>
             <a:prstGeom prst="ellipse">
@@ -9041,7 +9041,7 @@
           </p:nvSpPr>
           <p:spPr>
             <a:xfrm>
-              <a:off x="5059403" y="2524593"/>
+              <a:off x="5875663" y="3101358"/>
               <a:ext cx="49651" cy="49651"/>
             </a:xfrm>
             <a:prstGeom prst="ellipse">
@@ -9076,7 +9076,7 @@
           </p:nvSpPr>
           <p:spPr>
             <a:xfrm>
-              <a:off x="5875663" y="3101358"/>
+              <a:off x="2313909" y="3346702"/>
               <a:ext cx="49651" cy="49651"/>
             </a:xfrm>
             <a:prstGeom prst="ellipse">
@@ -9111,7 +9111,7 @@
           </p:nvSpPr>
           <p:spPr>
             <a:xfrm>
-              <a:off x="2313909" y="3346702"/>
+              <a:off x="3926693" y="2912221"/>
               <a:ext cx="49651" cy="49651"/>
             </a:xfrm>
             <a:prstGeom prst="ellipse">
@@ -9146,7 +9146,7 @@
           </p:nvSpPr>
           <p:spPr>
             <a:xfrm>
-              <a:off x="3926693" y="2912221"/>
+              <a:off x="6096994" y="3860949"/>
               <a:ext cx="49651" cy="49651"/>
             </a:xfrm>
             <a:prstGeom prst="ellipse">
@@ -9181,7 +9181,7 @@
           </p:nvSpPr>
           <p:spPr>
             <a:xfrm>
-              <a:off x="6096994" y="3860949"/>
+              <a:off x="3521568" y="2848103"/>
               <a:ext cx="49651" cy="49651"/>
             </a:xfrm>
             <a:prstGeom prst="ellipse">
@@ -9216,7 +9216,7 @@
           </p:nvSpPr>
           <p:spPr>
             <a:xfrm>
-              <a:off x="3521568" y="2848103"/>
+              <a:off x="3664565" y="3443204"/>
               <a:ext cx="49651" cy="49651"/>
             </a:xfrm>
             <a:prstGeom prst="ellipse">
@@ -9251,7 +9251,7 @@
           </p:nvSpPr>
           <p:spPr>
             <a:xfrm>
-              <a:off x="3664565" y="3443204"/>
+              <a:off x="4835678" y="3041965"/>
               <a:ext cx="49651" cy="49651"/>
             </a:xfrm>
             <a:prstGeom prst="ellipse">
@@ -9286,7 +9286,7 @@
           </p:nvSpPr>
           <p:spPr>
             <a:xfrm>
-              <a:off x="4835678" y="3041965"/>
+              <a:off x="3494844" y="3418459"/>
               <a:ext cx="49651" cy="49651"/>
             </a:xfrm>
             <a:prstGeom prst="ellipse">
@@ -9321,7 +9321,7 @@
           </p:nvSpPr>
           <p:spPr>
             <a:xfrm>
-              <a:off x="3494844" y="3418459"/>
+              <a:off x="4895356" y="3100711"/>
               <a:ext cx="49651" cy="49651"/>
             </a:xfrm>
             <a:prstGeom prst="ellipse">
@@ -9356,7 +9356,7 @@
           </p:nvSpPr>
           <p:spPr>
             <a:xfrm>
-              <a:off x="4895356" y="3100711"/>
+              <a:off x="5458610" y="3144322"/>
               <a:ext cx="49651" cy="49651"/>
             </a:xfrm>
             <a:prstGeom prst="ellipse">
@@ -9391,7 +9391,7 @@
           </p:nvSpPr>
           <p:spPr>
             <a:xfrm>
-              <a:off x="5458610" y="3144322"/>
+              <a:off x="5277490" y="3788593"/>
               <a:ext cx="49651" cy="49651"/>
             </a:xfrm>
             <a:prstGeom prst="ellipse">
@@ -9426,7 +9426,7 @@
           </p:nvSpPr>
           <p:spPr>
             <a:xfrm>
-              <a:off x="5277490" y="3788593"/>
+              <a:off x="5323320" y="3173528"/>
               <a:ext cx="49651" cy="49651"/>
             </a:xfrm>
             <a:prstGeom prst="ellipse">
@@ -9461,7 +9461,7 @@
           </p:nvSpPr>
           <p:spPr>
             <a:xfrm>
-              <a:off x="5323320" y="3173528"/>
+              <a:off x="4993100" y="2566718"/>
               <a:ext cx="49651" cy="49651"/>
             </a:xfrm>
             <a:prstGeom prst="ellipse">
@@ -9496,7 +9496,7 @@
           </p:nvSpPr>
           <p:spPr>
             <a:xfrm>
-              <a:off x="4993100" y="2566718"/>
+              <a:off x="4167383" y="3256009"/>
               <a:ext cx="49651" cy="49651"/>
             </a:xfrm>
             <a:prstGeom prst="ellipse">
@@ -9531,7 +9531,7 @@
           </p:nvSpPr>
           <p:spPr>
             <a:xfrm>
-              <a:off x="4167383" y="3256009"/>
+              <a:off x="7013423" y="3184778"/>
               <a:ext cx="49651" cy="49651"/>
             </a:xfrm>
             <a:prstGeom prst="ellipse">
@@ -9566,7 +9566,7 @@
           </p:nvSpPr>
           <p:spPr>
             <a:xfrm>
-              <a:off x="7013423" y="3184778"/>
+              <a:off x="4221466" y="3834959"/>
               <a:ext cx="49651" cy="49651"/>
             </a:xfrm>
             <a:prstGeom prst="ellipse">
@@ -9601,7 +9601,7 @@
           </p:nvSpPr>
           <p:spPr>
             <a:xfrm>
-              <a:off x="4221466" y="3834959"/>
+              <a:off x="6024856" y="2974216"/>
               <a:ext cx="49651" cy="49651"/>
             </a:xfrm>
             <a:prstGeom prst="ellipse">
@@ -9636,7 +9636,7 @@
           </p:nvSpPr>
           <p:spPr>
             <a:xfrm>
-              <a:off x="6024856" y="2974216"/>
+              <a:off x="3043094" y="3292903"/>
               <a:ext cx="49651" cy="49651"/>
             </a:xfrm>
             <a:prstGeom prst="ellipse">
@@ -9671,7 +9671,7 @@
           </p:nvSpPr>
           <p:spPr>
             <a:xfrm>
-              <a:off x="3043094" y="3292903"/>
+              <a:off x="5094888" y="3038192"/>
               <a:ext cx="49651" cy="49651"/>
             </a:xfrm>
             <a:prstGeom prst="ellipse">
@@ -9706,7 +9706,7 @@
           </p:nvSpPr>
           <p:spPr>
             <a:xfrm>
-              <a:off x="5094888" y="3038192"/>
+              <a:off x="2910947" y="2588201"/>
               <a:ext cx="49651" cy="49651"/>
             </a:xfrm>
             <a:prstGeom prst="ellipse">
@@ -9741,7 +9741,7 @@
           </p:nvSpPr>
           <p:spPr>
             <a:xfrm>
-              <a:off x="2910947" y="2588201"/>
+              <a:off x="4453271" y="2569895"/>
               <a:ext cx="49651" cy="49651"/>
             </a:xfrm>
             <a:prstGeom prst="ellipse">
@@ -9776,7 +9776,7 @@
           </p:nvSpPr>
           <p:spPr>
             <a:xfrm>
-              <a:off x="4453271" y="2569895"/>
+              <a:off x="2835452" y="3204246"/>
               <a:ext cx="49651" cy="49651"/>
             </a:xfrm>
             <a:prstGeom prst="ellipse">
@@ -9811,7 +9811,7 @@
           </p:nvSpPr>
           <p:spPr>
             <a:xfrm>
-              <a:off x="2835452" y="3204246"/>
+              <a:off x="5583247" y="2471245"/>
               <a:ext cx="49651" cy="49651"/>
             </a:xfrm>
             <a:prstGeom prst="ellipse">
@@ -9846,7 +9846,7 @@
           </p:nvSpPr>
           <p:spPr>
             <a:xfrm>
-              <a:off x="5583247" y="2471245"/>
+              <a:off x="2906496" y="3127013"/>
               <a:ext cx="49651" cy="49651"/>
             </a:xfrm>
             <a:prstGeom prst="ellipse">
@@ -9881,7 +9881,7 @@
           </p:nvSpPr>
           <p:spPr>
             <a:xfrm>
-              <a:off x="2906496" y="3127013"/>
+              <a:off x="4740032" y="3435664"/>
               <a:ext cx="49651" cy="49651"/>
             </a:xfrm>
             <a:prstGeom prst="ellipse">
@@ -9916,7 +9916,7 @@
           </p:nvSpPr>
           <p:spPr>
             <a:xfrm>
-              <a:off x="4740032" y="3435664"/>
+              <a:off x="5644870" y="3078037"/>
               <a:ext cx="49651" cy="49651"/>
             </a:xfrm>
             <a:prstGeom prst="ellipse">
@@ -9951,7 +9951,7 @@
           </p:nvSpPr>
           <p:spPr>
             <a:xfrm>
-              <a:off x="5644870" y="3078037"/>
+              <a:off x="5674952" y="3083129"/>
               <a:ext cx="49651" cy="49651"/>
             </a:xfrm>
             <a:prstGeom prst="ellipse">
@@ -9986,7 +9986,7 @@
           </p:nvSpPr>
           <p:spPr>
             <a:xfrm>
-              <a:off x="5674952" y="3083129"/>
+              <a:off x="4392386" y="2741886"/>
               <a:ext cx="49651" cy="49651"/>
             </a:xfrm>
             <a:prstGeom prst="ellipse">
@@ -10021,7 +10021,7 @@
           </p:nvSpPr>
           <p:spPr>
             <a:xfrm>
-              <a:off x="4392386" y="2741886"/>
+              <a:off x="4672183" y="2979185"/>
               <a:ext cx="49651" cy="49651"/>
             </a:xfrm>
             <a:prstGeom prst="ellipse">
@@ -10056,7 +10056,7 @@
           </p:nvSpPr>
           <p:spPr>
             <a:xfrm>
-              <a:off x="4672183" y="2979185"/>
+              <a:off x="3971816" y="2615786"/>
               <a:ext cx="49651" cy="49651"/>
             </a:xfrm>
             <a:prstGeom prst="ellipse">
@@ -10091,7 +10091,7 @@
           </p:nvSpPr>
           <p:spPr>
             <a:xfrm>
-              <a:off x="3971816" y="2615786"/>
+              <a:off x="6560823" y="2836882"/>
               <a:ext cx="49651" cy="49651"/>
             </a:xfrm>
             <a:prstGeom prst="ellipse">
@@ -10126,7 +10126,7 @@
           </p:nvSpPr>
           <p:spPr>
             <a:xfrm>
-              <a:off x="6560823" y="2836882"/>
+              <a:off x="6304358" y="2947644"/>
               <a:ext cx="49651" cy="49651"/>
             </a:xfrm>
             <a:prstGeom prst="ellipse">
@@ -10161,7 +10161,7 @@
           </p:nvSpPr>
           <p:spPr>
             <a:xfrm>
-              <a:off x="6304358" y="2947644"/>
+              <a:off x="4221118" y="3317698"/>
               <a:ext cx="49651" cy="49651"/>
             </a:xfrm>
             <a:prstGeom prst="ellipse">
@@ -10196,7 +10196,7 @@
           </p:nvSpPr>
           <p:spPr>
             <a:xfrm>
-              <a:off x="4221118" y="3317698"/>
+              <a:off x="3749978" y="3321919"/>
               <a:ext cx="49651" cy="49651"/>
             </a:xfrm>
             <a:prstGeom prst="ellipse">
@@ -10231,7 +10231,7 @@
           </p:nvSpPr>
           <p:spPr>
             <a:xfrm>
-              <a:off x="3749978" y="3321919"/>
+              <a:off x="6381848" y="3295368"/>
               <a:ext cx="49651" cy="49651"/>
             </a:xfrm>
             <a:prstGeom prst="ellipse">
@@ -10266,7 +10266,7 @@
           </p:nvSpPr>
           <p:spPr>
             <a:xfrm>
-              <a:off x="6381848" y="3295368"/>
+              <a:off x="5415701" y="2699960"/>
               <a:ext cx="49651" cy="49651"/>
             </a:xfrm>
             <a:prstGeom prst="ellipse">
@@ -10301,7 +10301,7 @@
           </p:nvSpPr>
           <p:spPr>
             <a:xfrm>
-              <a:off x="5415701" y="2699960"/>
+              <a:off x="7475327" y="3488504"/>
               <a:ext cx="49651" cy="49651"/>
             </a:xfrm>
             <a:prstGeom prst="ellipse">
@@ -10336,7 +10336,7 @@
           </p:nvSpPr>
           <p:spPr>
             <a:xfrm>
-              <a:off x="7475327" y="3488504"/>
+              <a:off x="7485535" y="3401767"/>
               <a:ext cx="49651" cy="49651"/>
             </a:xfrm>
             <a:prstGeom prst="ellipse">
@@ -10371,7 +10371,7 @@
           </p:nvSpPr>
           <p:spPr>
             <a:xfrm>
-              <a:off x="7485535" y="3401767"/>
+              <a:off x="5977695" y="3277344"/>
               <a:ext cx="49651" cy="49651"/>
             </a:xfrm>
             <a:prstGeom prst="ellipse">
@@ -10406,7 +10406,7 @@
           </p:nvSpPr>
           <p:spPr>
             <a:xfrm>
-              <a:off x="5977695" y="3277344"/>
+              <a:off x="4788924" y="2680512"/>
               <a:ext cx="49651" cy="49651"/>
             </a:xfrm>
             <a:prstGeom prst="ellipse">
@@ -10441,7 +10441,7 @@
           </p:nvSpPr>
           <p:spPr>
             <a:xfrm>
-              <a:off x="4788924" y="2680512"/>
+              <a:off x="5958904" y="4453970"/>
               <a:ext cx="49651" cy="49651"/>
             </a:xfrm>
             <a:prstGeom prst="ellipse">
@@ -10476,7 +10476,7 @@
           </p:nvSpPr>
           <p:spPr>
             <a:xfrm>
-              <a:off x="5958904" y="4453970"/>
+              <a:off x="5338120" y="3013048"/>
               <a:ext cx="49651" cy="49651"/>
             </a:xfrm>
             <a:prstGeom prst="ellipse">
@@ -10511,7 +10511,7 @@
           </p:nvSpPr>
           <p:spPr>
             <a:xfrm>
-              <a:off x="5338120" y="3013048"/>
+              <a:off x="5592968" y="3066222"/>
               <a:ext cx="49651" cy="49651"/>
             </a:xfrm>
             <a:prstGeom prst="ellipse">
@@ -10546,7 +10546,7 @@
           </p:nvSpPr>
           <p:spPr>
             <a:xfrm>
-              <a:off x="5592968" y="3066222"/>
+              <a:off x="6384837" y="3286811"/>
               <a:ext cx="49651" cy="49651"/>
             </a:xfrm>
             <a:prstGeom prst="ellipse">
@@ -10581,7 +10581,7 @@
           </p:nvSpPr>
           <p:spPr>
             <a:xfrm>
-              <a:off x="6384837" y="3286811"/>
+              <a:off x="5470465" y="3103343"/>
               <a:ext cx="49651" cy="49651"/>
             </a:xfrm>
             <a:prstGeom prst="ellipse">
@@ -10616,7 +10616,7 @@
           </p:nvSpPr>
           <p:spPr>
             <a:xfrm>
-              <a:off x="5470465" y="3103343"/>
+              <a:off x="5411635" y="3614193"/>
               <a:ext cx="49651" cy="49651"/>
             </a:xfrm>
             <a:prstGeom prst="ellipse">
@@ -10651,7 +10651,7 @@
           </p:nvSpPr>
           <p:spPr>
             <a:xfrm>
-              <a:off x="5411635" y="3614193"/>
+              <a:off x="6253281" y="2289701"/>
               <a:ext cx="49651" cy="49651"/>
             </a:xfrm>
             <a:prstGeom prst="ellipse">
@@ -10686,7 +10686,7 @@
           </p:nvSpPr>
           <p:spPr>
             <a:xfrm>
-              <a:off x="6253281" y="2289701"/>
+              <a:off x="5545549" y="4193890"/>
               <a:ext cx="49651" cy="49651"/>
             </a:xfrm>
             <a:prstGeom prst="ellipse">
@@ -10721,7 +10721,7 @@
           </p:nvSpPr>
           <p:spPr>
             <a:xfrm>
-              <a:off x="5545549" y="4193890"/>
+              <a:off x="5208515" y="2374434"/>
               <a:ext cx="49651" cy="49651"/>
             </a:xfrm>
             <a:prstGeom prst="ellipse">
@@ -10756,7 +10756,7 @@
           </p:nvSpPr>
           <p:spPr>
             <a:xfrm>
-              <a:off x="5208515" y="2374434"/>
+              <a:off x="5414622" y="2387461"/>
               <a:ext cx="49651" cy="49651"/>
             </a:xfrm>
             <a:prstGeom prst="ellipse">
@@ -10791,7 +10791,7 @@
           </p:nvSpPr>
           <p:spPr>
             <a:xfrm>
-              <a:off x="5414622" y="2387461"/>
+              <a:off x="5099258" y="2967472"/>
               <a:ext cx="49651" cy="49651"/>
             </a:xfrm>
             <a:prstGeom prst="ellipse">
@@ -10826,7 +10826,7 @@
           </p:nvSpPr>
           <p:spPr>
             <a:xfrm>
-              <a:off x="5099258" y="2967472"/>
+              <a:off x="5649401" y="3082447"/>
               <a:ext cx="49651" cy="49651"/>
             </a:xfrm>
             <a:prstGeom prst="ellipse">
@@ -10861,7 +10861,7 @@
           </p:nvSpPr>
           <p:spPr>
             <a:xfrm>
-              <a:off x="5649401" y="3082447"/>
+              <a:off x="4624446" y="3209978"/>
               <a:ext cx="49651" cy="49651"/>
             </a:xfrm>
             <a:prstGeom prst="ellipse">
@@ -10896,7 +10896,7 @@
           </p:nvSpPr>
           <p:spPr>
             <a:xfrm>
-              <a:off x="4624446" y="3209978"/>
+              <a:off x="4953490" y="3657460"/>
               <a:ext cx="49651" cy="49651"/>
             </a:xfrm>
             <a:prstGeom prst="ellipse">
@@ -10931,7 +10931,7 @@
           </p:nvSpPr>
           <p:spPr>
             <a:xfrm>
-              <a:off x="4953490" y="3657460"/>
+              <a:off x="3177521" y="3036029"/>
               <a:ext cx="49651" cy="49651"/>
             </a:xfrm>
             <a:prstGeom prst="ellipse">
@@ -10966,7 +10966,7 @@
           </p:nvSpPr>
           <p:spPr>
             <a:xfrm>
-              <a:off x="3177521" y="3036029"/>
+              <a:off x="4716607" y="2662654"/>
               <a:ext cx="49651" cy="49651"/>
             </a:xfrm>
             <a:prstGeom prst="ellipse">
@@ -11001,7 +11001,7 @@
           </p:nvSpPr>
           <p:spPr>
             <a:xfrm>
-              <a:off x="4716607" y="2662654"/>
+              <a:off x="5229976" y="3912265"/>
               <a:ext cx="49651" cy="49651"/>
             </a:xfrm>
             <a:prstGeom prst="ellipse">
@@ -11036,7 +11036,7 @@
           </p:nvSpPr>
           <p:spPr>
             <a:xfrm>
-              <a:off x="5229976" y="3912265"/>
+              <a:off x="4506831" y="4032544"/>
               <a:ext cx="49651" cy="49651"/>
             </a:xfrm>
             <a:prstGeom prst="ellipse">
@@ -11071,7 +11071,7 @@
           </p:nvSpPr>
           <p:spPr>
             <a:xfrm>
-              <a:off x="4506831" y="4032544"/>
+              <a:off x="2975550" y="3030985"/>
               <a:ext cx="49651" cy="49651"/>
             </a:xfrm>
             <a:prstGeom prst="ellipse">
@@ -11106,7 +11106,7 @@
           </p:nvSpPr>
           <p:spPr>
             <a:xfrm>
-              <a:off x="2975550" y="3030985"/>
+              <a:off x="4023557" y="2767328"/>
               <a:ext cx="49651" cy="49651"/>
             </a:xfrm>
             <a:prstGeom prst="ellipse">
@@ -11141,7 +11141,7 @@
           </p:nvSpPr>
           <p:spPr>
             <a:xfrm>
-              <a:off x="4023557" y="2767328"/>
+              <a:off x="6162004" y="2877763"/>
               <a:ext cx="49651" cy="49651"/>
             </a:xfrm>
             <a:prstGeom prst="ellipse">
@@ -11176,7 +11176,7 @@
           </p:nvSpPr>
           <p:spPr>
             <a:xfrm>
-              <a:off x="6162004" y="2877763"/>
+              <a:off x="3663751" y="2955096"/>
               <a:ext cx="49651" cy="49651"/>
             </a:xfrm>
             <a:prstGeom prst="ellipse">
@@ -11211,7 +11211,7 @@
           </p:nvSpPr>
           <p:spPr>
             <a:xfrm>
-              <a:off x="3663751" y="2955096"/>
+              <a:off x="8242371" y="2834223"/>
               <a:ext cx="49651" cy="49651"/>
             </a:xfrm>
             <a:prstGeom prst="ellipse">
@@ -11246,7 +11246,7 @@
           </p:nvSpPr>
           <p:spPr>
             <a:xfrm>
-              <a:off x="8242371" y="2834223"/>
+              <a:off x="5165834" y="4028686"/>
               <a:ext cx="49651" cy="49651"/>
             </a:xfrm>
             <a:prstGeom prst="ellipse">
@@ -11281,7 +11281,7 @@
           </p:nvSpPr>
           <p:spPr>
             <a:xfrm>
-              <a:off x="5165834" y="4028686"/>
+              <a:off x="6308880" y="3625050"/>
               <a:ext cx="49651" cy="49651"/>
             </a:xfrm>
             <a:prstGeom prst="ellipse">
@@ -11316,7 +11316,7 @@
           </p:nvSpPr>
           <p:spPr>
             <a:xfrm>
-              <a:off x="6308880" y="3625050"/>
+              <a:off x="5731772" y="2573557"/>
               <a:ext cx="49651" cy="49651"/>
             </a:xfrm>
             <a:prstGeom prst="ellipse">
@@ -11351,7 +11351,7 @@
           </p:nvSpPr>
           <p:spPr>
             <a:xfrm>
-              <a:off x="5731772" y="2573557"/>
+              <a:off x="4852127" y="4331797"/>
               <a:ext cx="49651" cy="49651"/>
             </a:xfrm>
             <a:prstGeom prst="ellipse">
@@ -11386,7 +11386,7 @@
           </p:nvSpPr>
           <p:spPr>
             <a:xfrm>
-              <a:off x="4852127" y="4331797"/>
+              <a:off x="6826816" y="3262726"/>
               <a:ext cx="49651" cy="49651"/>
             </a:xfrm>
             <a:prstGeom prst="ellipse">
@@ -11421,7 +11421,7 @@
           </p:nvSpPr>
           <p:spPr>
             <a:xfrm>
-              <a:off x="6826816" y="3262726"/>
+              <a:off x="5662004" y="5524381"/>
               <a:ext cx="49651" cy="49651"/>
             </a:xfrm>
             <a:prstGeom prst="ellipse">
@@ -11456,7 +11456,7 @@
           </p:nvSpPr>
           <p:spPr>
             <a:xfrm>
-              <a:off x="5662004" y="5524381"/>
+              <a:off x="4822121" y="3458503"/>
               <a:ext cx="49651" cy="49651"/>
             </a:xfrm>
             <a:prstGeom prst="ellipse">
@@ -11491,7 +11491,7 @@
           </p:nvSpPr>
           <p:spPr>
             <a:xfrm>
-              <a:off x="4822121" y="3458503"/>
+              <a:off x="5485826" y="3094723"/>
               <a:ext cx="49651" cy="49651"/>
             </a:xfrm>
             <a:prstGeom prst="ellipse">
@@ -11526,7 +11526,7 @@
           </p:nvSpPr>
           <p:spPr>
             <a:xfrm>
-              <a:off x="5485826" y="3094723"/>
+              <a:off x="3648190" y="2655158"/>
               <a:ext cx="49651" cy="49651"/>
             </a:xfrm>
             <a:prstGeom prst="ellipse">
@@ -11561,7 +11561,7 @@
           </p:nvSpPr>
           <p:spPr>
             <a:xfrm>
-              <a:off x="3648190" y="2655158"/>
+              <a:off x="6410607" y="4008672"/>
               <a:ext cx="49651" cy="49651"/>
             </a:xfrm>
             <a:prstGeom prst="ellipse">
@@ -11596,7 +11596,7 @@
           </p:nvSpPr>
           <p:spPr>
             <a:xfrm>
-              <a:off x="6410607" y="4008672"/>
+              <a:off x="4732583" y="2755142"/>
               <a:ext cx="49651" cy="49651"/>
             </a:xfrm>
             <a:prstGeom prst="ellipse">
@@ -11631,7 +11631,7 @@
           </p:nvSpPr>
           <p:spPr>
             <a:xfrm>
-              <a:off x="4732583" y="2755142"/>
+              <a:off x="4743790" y="3174113"/>
               <a:ext cx="49651" cy="49651"/>
             </a:xfrm>
             <a:prstGeom prst="ellipse">
@@ -11666,7 +11666,7 @@
           </p:nvSpPr>
           <p:spPr>
             <a:xfrm>
-              <a:off x="4743790" y="3174113"/>
+              <a:off x="5505890" y="3619913"/>
               <a:ext cx="49651" cy="49651"/>
             </a:xfrm>
             <a:prstGeom prst="ellipse">
@@ -11701,7 +11701,7 @@
           </p:nvSpPr>
           <p:spPr>
             <a:xfrm>
-              <a:off x="5505890" y="3619913"/>
+              <a:off x="5766779" y="3307953"/>
               <a:ext cx="49651" cy="49651"/>
             </a:xfrm>
             <a:prstGeom prst="ellipse">
@@ -11736,7 +11736,7 @@
           </p:nvSpPr>
           <p:spPr>
             <a:xfrm>
-              <a:off x="5766779" y="3307953"/>
+              <a:off x="7427620" y="2380533"/>
               <a:ext cx="49651" cy="49651"/>
             </a:xfrm>
             <a:prstGeom prst="ellipse">
@@ -11771,7 +11771,7 @@
           </p:nvSpPr>
           <p:spPr>
             <a:xfrm>
-              <a:off x="7427620" y="2380533"/>
+              <a:off x="6880530" y="4059764"/>
               <a:ext cx="49651" cy="49651"/>
             </a:xfrm>
             <a:prstGeom prst="ellipse">
@@ -11806,7 +11806,7 @@
           </p:nvSpPr>
           <p:spPr>
             <a:xfrm>
-              <a:off x="6880530" y="4059764"/>
+              <a:off x="5778088" y="3144999"/>
               <a:ext cx="49651" cy="49651"/>
             </a:xfrm>
             <a:prstGeom prst="ellipse">
@@ -11841,7 +11841,7 @@
           </p:nvSpPr>
           <p:spPr>
             <a:xfrm>
-              <a:off x="5778088" y="3144999"/>
+              <a:off x="5209458" y="2084305"/>
               <a:ext cx="49651" cy="49651"/>
             </a:xfrm>
             <a:prstGeom prst="ellipse">
@@ -11876,7 +11876,7 @@
           </p:nvSpPr>
           <p:spPr>
             <a:xfrm>
-              <a:off x="5209458" y="2084305"/>
+              <a:off x="2413979" y="3537619"/>
               <a:ext cx="49651" cy="49651"/>
             </a:xfrm>
             <a:prstGeom prst="ellipse">
@@ -11911,7 +11911,7 @@
           </p:nvSpPr>
           <p:spPr>
             <a:xfrm>
-              <a:off x="2413979" y="3537619"/>
+              <a:off x="5333054" y="3402522"/>
               <a:ext cx="49651" cy="49651"/>
             </a:xfrm>
             <a:prstGeom prst="ellipse">
@@ -11946,7 +11946,7 @@
           </p:nvSpPr>
           <p:spPr>
             <a:xfrm>
-              <a:off x="5333054" y="3402522"/>
+              <a:off x="6785523" y="2551512"/>
               <a:ext cx="49651" cy="49651"/>
             </a:xfrm>
             <a:prstGeom prst="ellipse">
@@ -11981,7 +11981,7 @@
           </p:nvSpPr>
           <p:spPr>
             <a:xfrm>
-              <a:off x="6785523" y="2551512"/>
+              <a:off x="5126317" y="3922624"/>
               <a:ext cx="49651" cy="49651"/>
             </a:xfrm>
             <a:prstGeom prst="ellipse">
@@ -12016,7 +12016,7 @@
           </p:nvSpPr>
           <p:spPr>
             <a:xfrm>
-              <a:off x="5126317" y="3922624"/>
+              <a:off x="4547771" y="2874433"/>
               <a:ext cx="49651" cy="49651"/>
             </a:xfrm>
             <a:prstGeom prst="ellipse">
@@ -12051,7 +12051,7 @@
           </p:nvSpPr>
           <p:spPr>
             <a:xfrm>
-              <a:off x="4547771" y="2874433"/>
+              <a:off x="3981929" y="3415910"/>
               <a:ext cx="49651" cy="49651"/>
             </a:xfrm>
             <a:prstGeom prst="ellipse">
@@ -12086,7 +12086,7 @@
           </p:nvSpPr>
           <p:spPr>
             <a:xfrm>
-              <a:off x="3981929" y="3415910"/>
+              <a:off x="4581140" y="3040018"/>
               <a:ext cx="49651" cy="49651"/>
             </a:xfrm>
             <a:prstGeom prst="ellipse">
@@ -12121,7 +12121,7 @@
           </p:nvSpPr>
           <p:spPr>
             <a:xfrm>
-              <a:off x="4581140" y="3040018"/>
+              <a:off x="5324392" y="3380269"/>
               <a:ext cx="49651" cy="49651"/>
             </a:xfrm>
             <a:prstGeom prst="ellipse">
@@ -12156,7 +12156,7 @@
           </p:nvSpPr>
           <p:spPr>
             <a:xfrm>
-              <a:off x="5324392" y="3380269"/>
+              <a:off x="6709548" y="2853976"/>
               <a:ext cx="49651" cy="49651"/>
             </a:xfrm>
             <a:prstGeom prst="ellipse">
@@ -12191,7 +12191,7 @@
           </p:nvSpPr>
           <p:spPr>
             <a:xfrm>
-              <a:off x="6709548" y="2853976"/>
+              <a:off x="5533876" y="2905172"/>
               <a:ext cx="49651" cy="49651"/>
             </a:xfrm>
             <a:prstGeom prst="ellipse">
@@ -12226,7 +12226,7 @@
           </p:nvSpPr>
           <p:spPr>
             <a:xfrm>
-              <a:off x="5533876" y="2905172"/>
+              <a:off x="6993723" y="2929515"/>
               <a:ext cx="49651" cy="49651"/>
             </a:xfrm>
             <a:prstGeom prst="ellipse">
@@ -12261,7 +12261,7 @@
           </p:nvSpPr>
           <p:spPr>
             <a:xfrm>
-              <a:off x="6993723" y="2929515"/>
+              <a:off x="4358087" y="2881262"/>
               <a:ext cx="49651" cy="49651"/>
             </a:xfrm>
             <a:prstGeom prst="ellipse">
@@ -12296,7 +12296,7 @@
           </p:nvSpPr>
           <p:spPr>
             <a:xfrm>
-              <a:off x="4358087" y="2881262"/>
+              <a:off x="5884728" y="2819543"/>
               <a:ext cx="49651" cy="49651"/>
             </a:xfrm>
             <a:prstGeom prst="ellipse">
@@ -12331,7 +12331,7 @@
           </p:nvSpPr>
           <p:spPr>
             <a:xfrm>
-              <a:off x="5884728" y="2819543"/>
+              <a:off x="3453783" y="4373104"/>
               <a:ext cx="49651" cy="49651"/>
             </a:xfrm>
             <a:prstGeom prst="ellipse">
@@ -12366,7 +12366,7 @@
           </p:nvSpPr>
           <p:spPr>
             <a:xfrm>
-              <a:off x="3453783" y="4373104"/>
+              <a:off x="3836189" y="3702513"/>
               <a:ext cx="49651" cy="49651"/>
             </a:xfrm>
             <a:prstGeom prst="ellipse">
@@ -12401,7 +12401,7 @@
           </p:nvSpPr>
           <p:spPr>
             <a:xfrm>
-              <a:off x="3836189" y="3702513"/>
+              <a:off x="5593514" y="3214022"/>
               <a:ext cx="49651" cy="49651"/>
             </a:xfrm>
             <a:prstGeom prst="ellipse">
@@ -12436,7 +12436,7 @@
           </p:nvSpPr>
           <p:spPr>
             <a:xfrm>
-              <a:off x="5593514" y="3214022"/>
+              <a:off x="4447358" y="2854984"/>
               <a:ext cx="49651" cy="49651"/>
             </a:xfrm>
             <a:prstGeom prst="ellipse">
@@ -12471,7 +12471,7 @@
           </p:nvSpPr>
           <p:spPr>
             <a:xfrm>
-              <a:off x="4447358" y="2854984"/>
+              <a:off x="3376771" y="2790286"/>
               <a:ext cx="49651" cy="49651"/>
             </a:xfrm>
             <a:prstGeom prst="ellipse">
@@ -12506,7 +12506,7 @@
           </p:nvSpPr>
           <p:spPr>
             <a:xfrm>
-              <a:off x="3376771" y="2790286"/>
+              <a:off x="4545228" y="2723131"/>
               <a:ext cx="49651" cy="49651"/>
             </a:xfrm>
             <a:prstGeom prst="ellipse">
@@ -12541,7 +12541,7 @@
           </p:nvSpPr>
           <p:spPr>
             <a:xfrm>
-              <a:off x="4545228" y="2723131"/>
+              <a:off x="5622706" y="2727851"/>
               <a:ext cx="49651" cy="49651"/>
             </a:xfrm>
             <a:prstGeom prst="ellipse">
@@ -12576,7 +12576,7 @@
           </p:nvSpPr>
           <p:spPr>
             <a:xfrm>
-              <a:off x="5622706" y="2727851"/>
+              <a:off x="5132600" y="2696217"/>
               <a:ext cx="49651" cy="49651"/>
             </a:xfrm>
             <a:prstGeom prst="ellipse">
@@ -12611,7 +12611,7 @@
           </p:nvSpPr>
           <p:spPr>
             <a:xfrm>
-              <a:off x="5132600" y="2696217"/>
+              <a:off x="4644852" y="2332156"/>
               <a:ext cx="49651" cy="49651"/>
             </a:xfrm>
             <a:prstGeom prst="ellipse">
@@ -12646,7 +12646,7 @@
           </p:nvSpPr>
           <p:spPr>
             <a:xfrm>
-              <a:off x="4644852" y="2332156"/>
+              <a:off x="3870744" y="3557589"/>
               <a:ext cx="49651" cy="49651"/>
             </a:xfrm>
             <a:prstGeom prst="ellipse">
@@ -12681,7 +12681,7 @@
           </p:nvSpPr>
           <p:spPr>
             <a:xfrm>
-              <a:off x="3870744" y="3557589"/>
+              <a:off x="8149940" y="4772225"/>
               <a:ext cx="49651" cy="49651"/>
             </a:xfrm>
             <a:prstGeom prst="ellipse">
@@ -12716,7 +12716,7 @@
           </p:nvSpPr>
           <p:spPr>
             <a:xfrm>
-              <a:off x="8149940" y="4772225"/>
+              <a:off x="2051716" y="3755827"/>
               <a:ext cx="49651" cy="49651"/>
             </a:xfrm>
             <a:prstGeom prst="ellipse">
@@ -12751,7 +12751,7 @@
           </p:nvSpPr>
           <p:spPr>
             <a:xfrm>
-              <a:off x="2051716" y="3755827"/>
+              <a:off x="5190603" y="2752689"/>
               <a:ext cx="49651" cy="49651"/>
             </a:xfrm>
             <a:prstGeom prst="ellipse">
@@ -12786,7 +12786,7 @@
           </p:nvSpPr>
           <p:spPr>
             <a:xfrm>
-              <a:off x="5190603" y="2752689"/>
+              <a:off x="7465373" y="3724335"/>
               <a:ext cx="49651" cy="49651"/>
             </a:xfrm>
             <a:prstGeom prst="ellipse">
@@ -12821,7 +12821,7 @@
           </p:nvSpPr>
           <p:spPr>
             <a:xfrm>
-              <a:off x="7465373" y="3724335"/>
+              <a:off x="1242100" y="3123255"/>
               <a:ext cx="49651" cy="49651"/>
             </a:xfrm>
             <a:prstGeom prst="ellipse">
@@ -12856,7 +12856,7 @@
           </p:nvSpPr>
           <p:spPr>
             <a:xfrm>
-              <a:off x="1242100" y="3123255"/>
+              <a:off x="4442078" y="2989068"/>
               <a:ext cx="49651" cy="49651"/>
             </a:xfrm>
             <a:prstGeom prst="ellipse">
@@ -12891,7 +12891,7 @@
           </p:nvSpPr>
           <p:spPr>
             <a:xfrm>
-              <a:off x="4442078" y="2989068"/>
+              <a:off x="5855470" y="3564746"/>
               <a:ext cx="49651" cy="49651"/>
             </a:xfrm>
             <a:prstGeom prst="ellipse">
@@ -12926,7 +12926,7 @@
           </p:nvSpPr>
           <p:spPr>
             <a:xfrm>
-              <a:off x="5855470" y="3564746"/>
+              <a:off x="3967197" y="2818155"/>
               <a:ext cx="49651" cy="49651"/>
             </a:xfrm>
             <a:prstGeom prst="ellipse">
@@ -12961,7 +12961,7 @@
           </p:nvSpPr>
           <p:spPr>
             <a:xfrm>
-              <a:off x="3967197" y="2818155"/>
+              <a:off x="3905234" y="2732088"/>
               <a:ext cx="49651" cy="49651"/>
             </a:xfrm>
             <a:prstGeom prst="ellipse">
@@ -12996,7 +12996,7 @@
           </p:nvSpPr>
           <p:spPr>
             <a:xfrm>
-              <a:off x="3905234" y="2732088"/>
+              <a:off x="5988432" y="2376060"/>
               <a:ext cx="49651" cy="49651"/>
             </a:xfrm>
             <a:prstGeom prst="ellipse">
@@ -13031,7 +13031,7 @@
           </p:nvSpPr>
           <p:spPr>
             <a:xfrm>
-              <a:off x="5988432" y="2376060"/>
+              <a:off x="6155958" y="3902559"/>
               <a:ext cx="49651" cy="49651"/>
             </a:xfrm>
             <a:prstGeom prst="ellipse">
@@ -13066,7 +13066,7 @@
           </p:nvSpPr>
           <p:spPr>
             <a:xfrm>
-              <a:off x="6155958" y="3902559"/>
+              <a:off x="7904447" y="3800285"/>
               <a:ext cx="49651" cy="49651"/>
             </a:xfrm>
             <a:prstGeom prst="ellipse">
@@ -13101,7 +13101,7 @@
           </p:nvSpPr>
           <p:spPr>
             <a:xfrm>
-              <a:off x="7904447" y="3800285"/>
+              <a:off x="5082079" y="2951171"/>
               <a:ext cx="49651" cy="49651"/>
             </a:xfrm>
             <a:prstGeom prst="ellipse">
@@ -13136,7 +13136,7 @@
           </p:nvSpPr>
           <p:spPr>
             <a:xfrm>
-              <a:off x="5082079" y="2951171"/>
+              <a:off x="6965466" y="2603854"/>
               <a:ext cx="49651" cy="49651"/>
             </a:xfrm>
             <a:prstGeom prst="ellipse">
@@ -13171,7 +13171,7 @@
           </p:nvSpPr>
           <p:spPr>
             <a:xfrm>
-              <a:off x="6965466" y="2603854"/>
+              <a:off x="8176250" y="3855475"/>
               <a:ext cx="49651" cy="49651"/>
             </a:xfrm>
             <a:prstGeom prst="ellipse">
@@ -13206,7 +13206,7 @@
           </p:nvSpPr>
           <p:spPr>
             <a:xfrm>
-              <a:off x="8176250" y="3855475"/>
+              <a:off x="4117968" y="2649642"/>
               <a:ext cx="49651" cy="49651"/>
             </a:xfrm>
             <a:prstGeom prst="ellipse">
@@ -13241,7 +13241,7 @@
           </p:nvSpPr>
           <p:spPr>
             <a:xfrm>
-              <a:off x="4117968" y="2649642"/>
+              <a:off x="6945187" y="3789523"/>
               <a:ext cx="49651" cy="49651"/>
             </a:xfrm>
             <a:prstGeom prst="ellipse">
@@ -13276,7 +13276,7 @@
           </p:nvSpPr>
           <p:spPr>
             <a:xfrm>
-              <a:off x="6945187" y="3789523"/>
+              <a:off x="3646167" y="3117518"/>
               <a:ext cx="49651" cy="49651"/>
             </a:xfrm>
             <a:prstGeom prst="ellipse">
@@ -13311,7 +13311,7 @@
           </p:nvSpPr>
           <p:spPr>
             <a:xfrm>
-              <a:off x="3646167" y="3117518"/>
+              <a:off x="4638274" y="3299366"/>
               <a:ext cx="49651" cy="49651"/>
             </a:xfrm>
             <a:prstGeom prst="ellipse">
@@ -13346,7 +13346,7 @@
           </p:nvSpPr>
           <p:spPr>
             <a:xfrm>
-              <a:off x="4638274" y="3299366"/>
+              <a:off x="5299417" y="2247124"/>
               <a:ext cx="49651" cy="49651"/>
             </a:xfrm>
             <a:prstGeom prst="ellipse">
@@ -13381,7 +13381,7 @@
           </p:nvSpPr>
           <p:spPr>
             <a:xfrm>
-              <a:off x="5299417" y="2247124"/>
+              <a:off x="5897580" y="2612995"/>
               <a:ext cx="49651" cy="49651"/>
             </a:xfrm>
             <a:prstGeom prst="ellipse">
@@ -13416,7 +13416,7 @@
           </p:nvSpPr>
           <p:spPr>
             <a:xfrm>
-              <a:off x="5897580" y="2612995"/>
+              <a:off x="5772159" y="2895623"/>
               <a:ext cx="49651" cy="49651"/>
             </a:xfrm>
             <a:prstGeom prst="ellipse">
@@ -13451,7 +13451,7 @@
           </p:nvSpPr>
           <p:spPr>
             <a:xfrm>
-              <a:off x="5772159" y="2895623"/>
+              <a:off x="4479011" y="2593114"/>
               <a:ext cx="49651" cy="49651"/>
             </a:xfrm>
             <a:prstGeom prst="ellipse">
@@ -13486,7 +13486,7 @@
           </p:nvSpPr>
           <p:spPr>
             <a:xfrm>
-              <a:off x="4479011" y="2593114"/>
+              <a:off x="4501066" y="2712974"/>
               <a:ext cx="49651" cy="49651"/>
             </a:xfrm>
             <a:prstGeom prst="ellipse">
@@ -13521,7 +13521,7 @@
           </p:nvSpPr>
           <p:spPr>
             <a:xfrm>
-              <a:off x="4501066" y="2712974"/>
+              <a:off x="4535932" y="3038492"/>
               <a:ext cx="49651" cy="49651"/>
             </a:xfrm>
             <a:prstGeom prst="ellipse">
@@ -13556,7 +13556,7 @@
           </p:nvSpPr>
           <p:spPr>
             <a:xfrm>
-              <a:off x="4535932" y="3038492"/>
+              <a:off x="6122406" y="2824841"/>
               <a:ext cx="49651" cy="49651"/>
             </a:xfrm>
             <a:prstGeom prst="ellipse">
@@ -13591,7 +13591,7 @@
           </p:nvSpPr>
           <p:spPr>
             <a:xfrm>
-              <a:off x="6122406" y="2824841"/>
+              <a:off x="7384992" y="3600615"/>
               <a:ext cx="49651" cy="49651"/>
             </a:xfrm>
             <a:prstGeom prst="ellipse">
@@ -13626,7 +13626,7 @@
           </p:nvSpPr>
           <p:spPr>
             <a:xfrm>
-              <a:off x="7384992" y="3600615"/>
+              <a:off x="4332214" y="2555068"/>
               <a:ext cx="49651" cy="49651"/>
             </a:xfrm>
             <a:prstGeom prst="ellipse">
@@ -13661,7 +13661,7 @@
           </p:nvSpPr>
           <p:spPr>
             <a:xfrm>
-              <a:off x="4332214" y="2555068"/>
+              <a:off x="5670464" y="2579515"/>
               <a:ext cx="49651" cy="49651"/>
             </a:xfrm>
             <a:prstGeom prst="ellipse">
@@ -13696,7 +13696,7 @@
           </p:nvSpPr>
           <p:spPr>
             <a:xfrm>
-              <a:off x="5670464" y="2579515"/>
+              <a:off x="6606296" y="2660253"/>
               <a:ext cx="49651" cy="49651"/>
             </a:xfrm>
             <a:prstGeom prst="ellipse">
@@ -13731,7 +13731,7 @@
           </p:nvSpPr>
           <p:spPr>
             <a:xfrm>
-              <a:off x="6606296" y="2660253"/>
+              <a:off x="6109834" y="2305716"/>
               <a:ext cx="49651" cy="49651"/>
             </a:xfrm>
             <a:prstGeom prst="ellipse">
@@ -13766,7 +13766,7 @@
           </p:nvSpPr>
           <p:spPr>
             <a:xfrm>
-              <a:off x="6109834" y="2305716"/>
+              <a:off x="7766605" y="3559952"/>
               <a:ext cx="49651" cy="49651"/>
             </a:xfrm>
             <a:prstGeom prst="ellipse">
@@ -13801,7 +13801,7 @@
           </p:nvSpPr>
           <p:spPr>
             <a:xfrm>
-              <a:off x="7766605" y="3559952"/>
+              <a:off x="7602238" y="3069635"/>
               <a:ext cx="49651" cy="49651"/>
             </a:xfrm>
             <a:prstGeom prst="ellipse">
@@ -13836,7 +13836,7 @@
           </p:nvSpPr>
           <p:spPr>
             <a:xfrm>
-              <a:off x="7602238" y="3069635"/>
+              <a:off x="6504001" y="4173390"/>
               <a:ext cx="49651" cy="49651"/>
             </a:xfrm>
             <a:prstGeom prst="ellipse">
@@ -13871,7 +13871,7 @@
           </p:nvSpPr>
           <p:spPr>
             <a:xfrm>
-              <a:off x="6504001" y="4173390"/>
+              <a:off x="5715374" y="2924849"/>
               <a:ext cx="49651" cy="49651"/>
             </a:xfrm>
             <a:prstGeom prst="ellipse">
@@ -13906,7 +13906,7 @@
           </p:nvSpPr>
           <p:spPr>
             <a:xfrm>
-              <a:off x="5715374" y="2924849"/>
+              <a:off x="5561988" y="3751447"/>
               <a:ext cx="49651" cy="49651"/>
             </a:xfrm>
             <a:prstGeom prst="ellipse">
@@ -13941,7 +13941,7 @@
           </p:nvSpPr>
           <p:spPr>
             <a:xfrm>
-              <a:off x="5561988" y="3751447"/>
+              <a:off x="7872373" y="3776272"/>
               <a:ext cx="49651" cy="49651"/>
             </a:xfrm>
             <a:prstGeom prst="ellipse">
@@ -13976,7 +13976,7 @@
           </p:nvSpPr>
           <p:spPr>
             <a:xfrm>
-              <a:off x="7872373" y="3776272"/>
+              <a:off x="5354072" y="2523828"/>
               <a:ext cx="49651" cy="49651"/>
             </a:xfrm>
             <a:prstGeom prst="ellipse">
@@ -14011,7 +14011,7 @@
           </p:nvSpPr>
           <p:spPr>
             <a:xfrm>
-              <a:off x="5354072" y="2523828"/>
+              <a:off x="5019512" y="2998914"/>
               <a:ext cx="49651" cy="49651"/>
             </a:xfrm>
             <a:prstGeom prst="ellipse">
@@ -14046,7 +14046,7 @@
           </p:nvSpPr>
           <p:spPr>
             <a:xfrm>
-              <a:off x="5019512" y="2998914"/>
+              <a:off x="4814334" y="3029228"/>
               <a:ext cx="49651" cy="49651"/>
             </a:xfrm>
             <a:prstGeom prst="ellipse">
@@ -14081,7 +14081,7 @@
           </p:nvSpPr>
           <p:spPr>
             <a:xfrm>
-              <a:off x="4814334" y="3029228"/>
+              <a:off x="5237811" y="2249820"/>
               <a:ext cx="49651" cy="49651"/>
             </a:xfrm>
             <a:prstGeom prst="ellipse">
@@ -14116,7 +14116,7 @@
           </p:nvSpPr>
           <p:spPr>
             <a:xfrm>
-              <a:off x="5237811" y="2249820"/>
+              <a:off x="5902426" y="4184903"/>
               <a:ext cx="49651" cy="49651"/>
             </a:xfrm>
             <a:prstGeom prst="ellipse">
@@ -14151,41 +14151,6 @@
           </p:nvSpPr>
           <p:spPr>
             <a:xfrm>
-              <a:off x="5902426" y="4184903"/>
-              <a:ext cx="49651" cy="49651"/>
-            </a:xfrm>
-            <a:prstGeom prst="ellipse">
-              <a:avLst/>
-            </a:prstGeom>
-            <a:solidFill>
-              <a:srgbClr val="000000">
-                <a:alpha val="29803"/>
-              </a:srgbClr>
-            </a:solidFill>
-            <a:ln w="9000" cap="rnd">
-              <a:solidFill>
-                <a:srgbClr val="000000">
-                  <a:alpha val="29803"/>
-                </a:srgbClr>
-              </a:solidFill>
-              <a:prstDash val="solid"/>
-              <a:round/>
-            </a:ln>
-          </p:spPr>
-          <p:txBody>
-            <a:bodyPr/>
-            <a:lstStyle/>
-            <a:p/>
-          </p:txBody>
-        </p:sp>
-        <p:sp>
-          <p:nvSpPr>
-            <p:cNvPr id="341" name="pt341"/>
-            <p:cNvSpPr/>
-            <p:nvPr/>
-          </p:nvSpPr>
-          <p:spPr>
-            <a:xfrm>
               <a:off x="5313400" y="3471244"/>
               <a:ext cx="49651" cy="49651"/>
             </a:xfrm>
@@ -14215,498 +14180,498 @@
         </p:sp>
         <p:sp>
           <p:nvSpPr>
-            <p:cNvPr id="342" name="pg342"/>
-            <p:cNvSpPr/>
-            <p:nvPr/>
-          </p:nvSpPr>
-          <p:spPr>
-            <a:xfrm>
-              <a:off x="1266926" y="2720832"/>
-              <a:ext cx="7000270" cy="700955"/>
+            <p:cNvPr id="341" name="pg341"/>
+            <p:cNvSpPr/>
+            <p:nvPr/>
+          </p:nvSpPr>
+          <p:spPr>
+            <a:xfrm>
+              <a:off x="1266926" y="2709643"/>
+              <a:ext cx="7000270" cy="717642"/>
             </a:xfrm>
             <a:custGeom>
               <a:avLst/>
               <a:pathLst>
-                <a:path w="7000270" h="700955">
+                <a:path w="7000270" h="717642">
                   <a:moveTo>
                     <a:pt x="0" y="0"/>
                   </a:moveTo>
                   <a:lnTo>
-                    <a:pt x="88611" y="8396"/>
-                  </a:lnTo>
-                  <a:lnTo>
-                    <a:pt x="177222" y="16784"/>
-                  </a:lnTo>
-                  <a:lnTo>
-                    <a:pt x="265833" y="25161"/>
-                  </a:lnTo>
-                  <a:lnTo>
-                    <a:pt x="354444" y="33527"/>
-                  </a:lnTo>
-                  <a:lnTo>
-                    <a:pt x="443055" y="41882"/>
-                  </a:lnTo>
-                  <a:lnTo>
-                    <a:pt x="531666" y="50225"/>
-                  </a:lnTo>
-                  <a:lnTo>
-                    <a:pt x="620277" y="58554"/>
-                  </a:lnTo>
-                  <a:lnTo>
-                    <a:pt x="708888" y="66869"/>
-                  </a:lnTo>
-                  <a:lnTo>
-                    <a:pt x="797499" y="75169"/>
-                  </a:lnTo>
-                  <a:lnTo>
-                    <a:pt x="886110" y="83452"/>
-                  </a:lnTo>
-                  <a:lnTo>
-                    <a:pt x="974721" y="91718"/>
-                  </a:lnTo>
-                  <a:lnTo>
-                    <a:pt x="1063332" y="99964"/>
-                  </a:lnTo>
-                  <a:lnTo>
-                    <a:pt x="1151943" y="108190"/>
-                  </a:lnTo>
-                  <a:lnTo>
-                    <a:pt x="1240554" y="116393"/>
-                  </a:lnTo>
-                  <a:lnTo>
-                    <a:pt x="1329165" y="124572"/>
-                  </a:lnTo>
-                  <a:lnTo>
-                    <a:pt x="1417776" y="132724"/>
-                  </a:lnTo>
-                  <a:lnTo>
-                    <a:pt x="1506387" y="140847"/>
-                  </a:lnTo>
-                  <a:lnTo>
-                    <a:pt x="1594998" y="148939"/>
-                  </a:lnTo>
-                  <a:lnTo>
-                    <a:pt x="1683609" y="156997"/>
-                  </a:lnTo>
-                  <a:lnTo>
-                    <a:pt x="1772220" y="165016"/>
-                  </a:lnTo>
-                  <a:lnTo>
-                    <a:pt x="1860831" y="172995"/>
-                  </a:lnTo>
-                  <a:lnTo>
-                    <a:pt x="1949442" y="180928"/>
-                  </a:lnTo>
-                  <a:lnTo>
-                    <a:pt x="2038053" y="188811"/>
-                  </a:lnTo>
-                  <a:lnTo>
-                    <a:pt x="2126664" y="196638"/>
-                  </a:lnTo>
-                  <a:lnTo>
-                    <a:pt x="2215275" y="204405"/>
-                  </a:lnTo>
-                  <a:lnTo>
-                    <a:pt x="2303886" y="212103"/>
-                  </a:lnTo>
-                  <a:lnTo>
-                    <a:pt x="2392497" y="219728"/>
-                  </a:lnTo>
-                  <a:lnTo>
-                    <a:pt x="2481108" y="227269"/>
-                  </a:lnTo>
-                  <a:lnTo>
-                    <a:pt x="2569719" y="234718"/>
-                  </a:lnTo>
-                  <a:lnTo>
-                    <a:pt x="2658330" y="242064"/>
-                  </a:lnTo>
-                  <a:lnTo>
-                    <a:pt x="2746941" y="249297"/>
-                  </a:lnTo>
-                  <a:lnTo>
-                    <a:pt x="2835552" y="256404"/>
-                  </a:lnTo>
-                  <a:lnTo>
-                    <a:pt x="2924163" y="263371"/>
-                  </a:lnTo>
-                  <a:lnTo>
-                    <a:pt x="3012774" y="270184"/>
-                  </a:lnTo>
-                  <a:lnTo>
-                    <a:pt x="3101385" y="276826"/>
-                  </a:lnTo>
-                  <a:lnTo>
-                    <a:pt x="3189996" y="283280"/>
-                  </a:lnTo>
-                  <a:lnTo>
-                    <a:pt x="3278607" y="289531"/>
-                  </a:lnTo>
-                  <a:lnTo>
-                    <a:pt x="3367218" y="295560"/>
-                  </a:lnTo>
-                  <a:lnTo>
-                    <a:pt x="3455829" y="301350"/>
-                  </a:lnTo>
-                  <a:lnTo>
-                    <a:pt x="3544440" y="306887"/>
-                  </a:lnTo>
-                  <a:lnTo>
-                    <a:pt x="3633051" y="312157"/>
-                  </a:lnTo>
-                  <a:lnTo>
-                    <a:pt x="3721662" y="317149"/>
-                  </a:lnTo>
-                  <a:lnTo>
-                    <a:pt x="3810273" y="321856"/>
-                  </a:lnTo>
-                  <a:lnTo>
-                    <a:pt x="3898884" y="326276"/>
-                  </a:lnTo>
-                  <a:lnTo>
-                    <a:pt x="3987495" y="330408"/>
-                  </a:lnTo>
-                  <a:lnTo>
-                    <a:pt x="4076107" y="334258"/>
-                  </a:lnTo>
-                  <a:lnTo>
-                    <a:pt x="4164718" y="337834"/>
-                  </a:lnTo>
-                  <a:lnTo>
-                    <a:pt x="4253329" y="341150"/>
-                  </a:lnTo>
-                  <a:lnTo>
-                    <a:pt x="4341940" y="344219"/>
-                  </a:lnTo>
-                  <a:lnTo>
-                    <a:pt x="4430551" y="347057"/>
-                  </a:lnTo>
-                  <a:lnTo>
-                    <a:pt x="4519162" y="349682"/>
-                  </a:lnTo>
-                  <a:lnTo>
-                    <a:pt x="4607773" y="352110"/>
-                  </a:lnTo>
-                  <a:lnTo>
-                    <a:pt x="4696384" y="354359"/>
-                  </a:lnTo>
-                  <a:lnTo>
-                    <a:pt x="4784995" y="356444"/>
-                  </a:lnTo>
-                  <a:lnTo>
-                    <a:pt x="4873606" y="358383"/>
-                  </a:lnTo>
-                  <a:lnTo>
-                    <a:pt x="4962217" y="360187"/>
-                  </a:lnTo>
-                  <a:lnTo>
-                    <a:pt x="5050828" y="361872"/>
-                  </a:lnTo>
-                  <a:lnTo>
-                    <a:pt x="5139439" y="363448"/>
-                  </a:lnTo>
-                  <a:lnTo>
-                    <a:pt x="5228050" y="364927"/>
-                  </a:lnTo>
-                  <a:lnTo>
-                    <a:pt x="5316661" y="366318"/>
-                  </a:lnTo>
-                  <a:lnTo>
-                    <a:pt x="5405272" y="367630"/>
-                  </a:lnTo>
-                  <a:lnTo>
-                    <a:pt x="5493883" y="368871"/>
-                  </a:lnTo>
-                  <a:lnTo>
-                    <a:pt x="5582494" y="370047"/>
-                  </a:lnTo>
-                  <a:lnTo>
-                    <a:pt x="5671105" y="371165"/>
-                  </a:lnTo>
-                  <a:lnTo>
-                    <a:pt x="5759716" y="372230"/>
-                  </a:lnTo>
-                  <a:lnTo>
-                    <a:pt x="5848327" y="373247"/>
-                  </a:lnTo>
-                  <a:lnTo>
-                    <a:pt x="5936938" y="374221"/>
-                  </a:lnTo>
-                  <a:lnTo>
-                    <a:pt x="6025549" y="375155"/>
-                  </a:lnTo>
-                  <a:lnTo>
-                    <a:pt x="6114160" y="376053"/>
-                  </a:lnTo>
-                  <a:lnTo>
-                    <a:pt x="6202771" y="376917"/>
-                  </a:lnTo>
-                  <a:lnTo>
-                    <a:pt x="6291382" y="377752"/>
-                  </a:lnTo>
-                  <a:lnTo>
-                    <a:pt x="6379993" y="378559"/>
-                  </a:lnTo>
-                  <a:lnTo>
-                    <a:pt x="6468604" y="379340"/>
-                  </a:lnTo>
-                  <a:lnTo>
-                    <a:pt x="6557215" y="380098"/>
-                  </a:lnTo>
-                  <a:lnTo>
-                    <a:pt x="6645826" y="380834"/>
-                  </a:lnTo>
-                  <a:lnTo>
-                    <a:pt x="6734437" y="381550"/>
-                  </a:lnTo>
-                  <a:lnTo>
-                    <a:pt x="6823048" y="382248"/>
-                  </a:lnTo>
-                  <a:lnTo>
-                    <a:pt x="6911659" y="382928"/>
-                  </a:lnTo>
-                  <a:lnTo>
-                    <a:pt x="7000270" y="383593"/>
-                  </a:lnTo>
-                  <a:lnTo>
-                    <a:pt x="7000270" y="700955"/>
-                  </a:lnTo>
-                  <a:lnTo>
-                    <a:pt x="6911659" y="692648"/>
-                  </a:lnTo>
-                  <a:lnTo>
-                    <a:pt x="6823048" y="684357"/>
-                  </a:lnTo>
-                  <a:lnTo>
-                    <a:pt x="6734437" y="676083"/>
-                  </a:lnTo>
-                  <a:lnTo>
-                    <a:pt x="6645826" y="667828"/>
-                  </a:lnTo>
-                  <a:lnTo>
-                    <a:pt x="6557215" y="659592"/>
-                  </a:lnTo>
-                  <a:lnTo>
-                    <a:pt x="6468604" y="651378"/>
-                  </a:lnTo>
-                  <a:lnTo>
-                    <a:pt x="6379993" y="643188"/>
-                  </a:lnTo>
-                  <a:lnTo>
-                    <a:pt x="6291382" y="635023"/>
-                  </a:lnTo>
-                  <a:lnTo>
-                    <a:pt x="6202771" y="626886"/>
-                  </a:lnTo>
-                  <a:lnTo>
-                    <a:pt x="6114160" y="618779"/>
-                  </a:lnTo>
-                  <a:lnTo>
-                    <a:pt x="6025549" y="610705"/>
-                  </a:lnTo>
-                  <a:lnTo>
-                    <a:pt x="5936938" y="602668"/>
-                  </a:lnTo>
-                  <a:lnTo>
-                    <a:pt x="5848327" y="594670"/>
-                  </a:lnTo>
-                  <a:lnTo>
-                    <a:pt x="5759716" y="586715"/>
-                  </a:lnTo>
-                  <a:lnTo>
-                    <a:pt x="5671105" y="578809"/>
-                  </a:lnTo>
-                  <a:lnTo>
-                    <a:pt x="5582494" y="570955"/>
-                  </a:lnTo>
-                  <a:lnTo>
-                    <a:pt x="5493883" y="563160"/>
-                  </a:lnTo>
-                  <a:lnTo>
-                    <a:pt x="5405272" y="555429"/>
-                  </a:lnTo>
-                  <a:lnTo>
-                    <a:pt x="5316661" y="547769"/>
-                  </a:lnTo>
-                  <a:lnTo>
-                    <a:pt x="5228050" y="540188"/>
-                  </a:lnTo>
-                  <a:lnTo>
-                    <a:pt x="5139439" y="532696"/>
-                  </a:lnTo>
-                  <a:lnTo>
-                    <a:pt x="5050828" y="525300"/>
-                  </a:lnTo>
-                  <a:lnTo>
-                    <a:pt x="4962217" y="518013"/>
-                  </a:lnTo>
-                  <a:lnTo>
-                    <a:pt x="4873606" y="510847"/>
-                  </a:lnTo>
-                  <a:lnTo>
-                    <a:pt x="4784995" y="503813"/>
-                  </a:lnTo>
-                  <a:lnTo>
-                    <a:pt x="4696384" y="496927"/>
-                  </a:lnTo>
-                  <a:lnTo>
-                    <a:pt x="4607773" y="490205"/>
-                  </a:lnTo>
-                  <a:lnTo>
-                    <a:pt x="4519162" y="483661"/>
-                  </a:lnTo>
-                  <a:lnTo>
-                    <a:pt x="4430551" y="477314"/>
-                  </a:lnTo>
-                  <a:lnTo>
-                    <a:pt x="4341940" y="471181"/>
-                  </a:lnTo>
-                  <a:lnTo>
-                    <a:pt x="4253329" y="465278"/>
-                  </a:lnTo>
-                  <a:lnTo>
-                    <a:pt x="4164718" y="459622"/>
-                  </a:lnTo>
-                  <a:lnTo>
-                    <a:pt x="4076107" y="454227"/>
-                  </a:lnTo>
-                  <a:lnTo>
-                    <a:pt x="3987495" y="449105"/>
-                  </a:lnTo>
-                  <a:lnTo>
-                    <a:pt x="3898884" y="444266"/>
-                  </a:lnTo>
-                  <a:lnTo>
-                    <a:pt x="3810273" y="439713"/>
-                  </a:lnTo>
-                  <a:lnTo>
-                    <a:pt x="3721662" y="435449"/>
-                  </a:lnTo>
-                  <a:lnTo>
-                    <a:pt x="3633051" y="431470"/>
-                  </a:lnTo>
-                  <a:lnTo>
-                    <a:pt x="3544440" y="427768"/>
-                  </a:lnTo>
-                  <a:lnTo>
-                    <a:pt x="3455829" y="424333"/>
-                  </a:lnTo>
-                  <a:lnTo>
-                    <a:pt x="3367218" y="421152"/>
-                  </a:lnTo>
-                  <a:lnTo>
-                    <a:pt x="3278607" y="418209"/>
-                  </a:lnTo>
-                  <a:lnTo>
-                    <a:pt x="3189996" y="415488"/>
-                  </a:lnTo>
-                  <a:lnTo>
-                    <a:pt x="3101385" y="412971"/>
-                  </a:lnTo>
-                  <a:lnTo>
-                    <a:pt x="3012774" y="410642"/>
-                  </a:lnTo>
-                  <a:lnTo>
-                    <a:pt x="2924163" y="408483"/>
-                  </a:lnTo>
-                  <a:lnTo>
-                    <a:pt x="2835552" y="406478"/>
-                  </a:lnTo>
-                  <a:lnTo>
-                    <a:pt x="2746941" y="404613"/>
-                  </a:lnTo>
-                  <a:lnTo>
-                    <a:pt x="2658330" y="402875"/>
-                  </a:lnTo>
-                  <a:lnTo>
-                    <a:pt x="2569719" y="401250"/>
-                  </a:lnTo>
-                  <a:lnTo>
-                    <a:pt x="2481108" y="399727"/>
-                  </a:lnTo>
-                  <a:lnTo>
-                    <a:pt x="2392497" y="398296"/>
-                  </a:lnTo>
-                  <a:lnTo>
-                    <a:pt x="2303886" y="396949"/>
-                  </a:lnTo>
-                  <a:lnTo>
-                    <a:pt x="2215275" y="395676"/>
-                  </a:lnTo>
-                  <a:lnTo>
-                    <a:pt x="2126664" y="394471"/>
-                  </a:lnTo>
-                  <a:lnTo>
-                    <a:pt x="2038053" y="393327"/>
-                  </a:lnTo>
-                  <a:lnTo>
-                    <a:pt x="1949442" y="392238"/>
-                  </a:lnTo>
-                  <a:lnTo>
-                    <a:pt x="1860831" y="391200"/>
-                  </a:lnTo>
-                  <a:lnTo>
-                    <a:pt x="1772220" y="390206"/>
-                  </a:lnTo>
-                  <a:lnTo>
-                    <a:pt x="1683609" y="389254"/>
-                  </a:lnTo>
-                  <a:lnTo>
-                    <a:pt x="1594998" y="388340"/>
-                  </a:lnTo>
-                  <a:lnTo>
-                    <a:pt x="1506387" y="387461"/>
-                  </a:lnTo>
-                  <a:lnTo>
-                    <a:pt x="1417776" y="386612"/>
-                  </a:lnTo>
-                  <a:lnTo>
-                    <a:pt x="1329165" y="385793"/>
-                  </a:lnTo>
-                  <a:lnTo>
-                    <a:pt x="1240554" y="385000"/>
-                  </a:lnTo>
-                  <a:lnTo>
-                    <a:pt x="1151943" y="384232"/>
-                  </a:lnTo>
-                  <a:lnTo>
-                    <a:pt x="1063332" y="383486"/>
-                  </a:lnTo>
-                  <a:lnTo>
-                    <a:pt x="974721" y="382761"/>
-                  </a:lnTo>
-                  <a:lnTo>
-                    <a:pt x="886110" y="382055"/>
-                  </a:lnTo>
-                  <a:lnTo>
-                    <a:pt x="797499" y="381366"/>
-                  </a:lnTo>
-                  <a:lnTo>
-                    <a:pt x="708888" y="380694"/>
-                  </a:lnTo>
-                  <a:lnTo>
-                    <a:pt x="620277" y="380038"/>
-                  </a:lnTo>
-                  <a:lnTo>
-                    <a:pt x="531666" y="379396"/>
-                  </a:lnTo>
-                  <a:lnTo>
-                    <a:pt x="443055" y="378766"/>
-                  </a:lnTo>
-                  <a:lnTo>
-                    <a:pt x="354444" y="378150"/>
-                  </a:lnTo>
-                  <a:lnTo>
-                    <a:pt x="265833" y="377544"/>
-                  </a:lnTo>
-                  <a:lnTo>
-                    <a:pt x="177222" y="376950"/>
-                  </a:lnTo>
-                  <a:lnTo>
-                    <a:pt x="88611" y="376366"/>
-                  </a:lnTo>
-                  <a:lnTo>
-                    <a:pt x="0" y="375791"/>
+                    <a:pt x="88611" y="8608"/>
+                  </a:lnTo>
+                  <a:lnTo>
+                    <a:pt x="177222" y="17208"/>
+                  </a:lnTo>
+                  <a:lnTo>
+                    <a:pt x="265833" y="25797"/>
+                  </a:lnTo>
+                  <a:lnTo>
+                    <a:pt x="354444" y="34376"/>
+                  </a:lnTo>
+                  <a:lnTo>
+                    <a:pt x="443055" y="42943"/>
+                  </a:lnTo>
+                  <a:lnTo>
+                    <a:pt x="531666" y="51498"/>
+                  </a:lnTo>
+                  <a:lnTo>
+                    <a:pt x="620277" y="60040"/>
+                  </a:lnTo>
+                  <a:lnTo>
+                    <a:pt x="708888" y="68568"/>
+                  </a:lnTo>
+                  <a:lnTo>
+                    <a:pt x="797499" y="77080"/>
+                  </a:lnTo>
+                  <a:lnTo>
+                    <a:pt x="886110" y="85576"/>
+                  </a:lnTo>
+                  <a:lnTo>
+                    <a:pt x="974721" y="94054"/>
+                  </a:lnTo>
+                  <a:lnTo>
+                    <a:pt x="1063332" y="102514"/>
+                  </a:lnTo>
+                  <a:lnTo>
+                    <a:pt x="1151943" y="110952"/>
+                  </a:lnTo>
+                  <a:lnTo>
+                    <a:pt x="1240554" y="119368"/>
+                  </a:lnTo>
+                  <a:lnTo>
+                    <a:pt x="1329165" y="127761"/>
+                  </a:lnTo>
+                  <a:lnTo>
+                    <a:pt x="1417776" y="136126"/>
+                  </a:lnTo>
+                  <a:lnTo>
+                    <a:pt x="1506387" y="144463"/>
+                  </a:lnTo>
+                  <a:lnTo>
+                    <a:pt x="1594998" y="152769"/>
+                  </a:lnTo>
+                  <a:lnTo>
+                    <a:pt x="1683609" y="161040"/>
+                  </a:lnTo>
+                  <a:lnTo>
+                    <a:pt x="1772220" y="169274"/>
+                  </a:lnTo>
+                  <a:lnTo>
+                    <a:pt x="1860831" y="177467"/>
+                  </a:lnTo>
+                  <a:lnTo>
+                    <a:pt x="1949442" y="185614"/>
+                  </a:lnTo>
+                  <a:lnTo>
+                    <a:pt x="2038053" y="193712"/>
+                  </a:lnTo>
+                  <a:lnTo>
+                    <a:pt x="2126664" y="201755"/>
+                  </a:lnTo>
+                  <a:lnTo>
+                    <a:pt x="2215275" y="209737"/>
+                  </a:lnTo>
+                  <a:lnTo>
+                    <a:pt x="2303886" y="217652"/>
+                  </a:lnTo>
+                  <a:lnTo>
+                    <a:pt x="2392497" y="225492"/>
+                  </a:lnTo>
+                  <a:lnTo>
+                    <a:pt x="2481108" y="233250"/>
+                  </a:lnTo>
+                  <a:lnTo>
+                    <a:pt x="2569719" y="240916"/>
+                  </a:lnTo>
+                  <a:lnTo>
+                    <a:pt x="2658330" y="248480"/>
+                  </a:lnTo>
+                  <a:lnTo>
+                    <a:pt x="2746941" y="255932"/>
+                  </a:lnTo>
+                  <a:lnTo>
+                    <a:pt x="2835552" y="263257"/>
+                  </a:lnTo>
+                  <a:lnTo>
+                    <a:pt x="2924163" y="270443"/>
+                  </a:lnTo>
+                  <a:lnTo>
+                    <a:pt x="3012774" y="277476"/>
+                  </a:lnTo>
+                  <a:lnTo>
+                    <a:pt x="3101385" y="284338"/>
+                  </a:lnTo>
+                  <a:lnTo>
+                    <a:pt x="3189996" y="291013"/>
+                  </a:lnTo>
+                  <a:lnTo>
+                    <a:pt x="3278607" y="297485"/>
+                  </a:lnTo>
+                  <a:lnTo>
+                    <a:pt x="3367218" y="303735"/>
+                  </a:lnTo>
+                  <a:lnTo>
+                    <a:pt x="3455829" y="309746"/>
+                  </a:lnTo>
+                  <a:lnTo>
+                    <a:pt x="3544440" y="315504"/>
+                  </a:lnTo>
+                  <a:lnTo>
+                    <a:pt x="3633051" y="320994"/>
+                  </a:lnTo>
+                  <a:lnTo>
+                    <a:pt x="3721662" y="326205"/>
+                  </a:lnTo>
+                  <a:lnTo>
+                    <a:pt x="3810273" y="331130"/>
+                  </a:lnTo>
+                  <a:lnTo>
+                    <a:pt x="3898884" y="335765"/>
+                  </a:lnTo>
+                  <a:lnTo>
+                    <a:pt x="3987495" y="340111"/>
+                  </a:lnTo>
+                  <a:lnTo>
+                    <a:pt x="4076107" y="344173"/>
+                  </a:lnTo>
+                  <a:lnTo>
+                    <a:pt x="4164718" y="347959"/>
+                  </a:lnTo>
+                  <a:lnTo>
+                    <a:pt x="4253329" y="351482"/>
+                  </a:lnTo>
+                  <a:lnTo>
+                    <a:pt x="4341940" y="354756"/>
+                  </a:lnTo>
+                  <a:lnTo>
+                    <a:pt x="4430551" y="357796"/>
+                  </a:lnTo>
+                  <a:lnTo>
+                    <a:pt x="4519162" y="360621"/>
+                  </a:lnTo>
+                  <a:lnTo>
+                    <a:pt x="4607773" y="363247"/>
+                  </a:lnTo>
+                  <a:lnTo>
+                    <a:pt x="4696384" y="365693"/>
+                  </a:lnTo>
+                  <a:lnTo>
+                    <a:pt x="4784995" y="367973"/>
+                  </a:lnTo>
+                  <a:lnTo>
+                    <a:pt x="4873606" y="370104"/>
+                  </a:lnTo>
+                  <a:lnTo>
+                    <a:pt x="4962217" y="372100"/>
+                  </a:lnTo>
+                  <a:lnTo>
+                    <a:pt x="5050828" y="373975"/>
+                  </a:lnTo>
+                  <a:lnTo>
+                    <a:pt x="5139439" y="375741"/>
+                  </a:lnTo>
+                  <a:lnTo>
+                    <a:pt x="5228050" y="377408"/>
+                  </a:lnTo>
+                  <a:lnTo>
+                    <a:pt x="5316661" y="378986"/>
+                  </a:lnTo>
+                  <a:lnTo>
+                    <a:pt x="5405272" y="380485"/>
+                  </a:lnTo>
+                  <a:lnTo>
+                    <a:pt x="5493883" y="381911"/>
+                  </a:lnTo>
+                  <a:lnTo>
+                    <a:pt x="5582494" y="383273"/>
+                  </a:lnTo>
+                  <a:lnTo>
+                    <a:pt x="5671105" y="384576"/>
+                  </a:lnTo>
+                  <a:lnTo>
+                    <a:pt x="5759716" y="385825"/>
+                  </a:lnTo>
+                  <a:lnTo>
+                    <a:pt x="5848327" y="387027"/>
+                  </a:lnTo>
+                  <a:lnTo>
+                    <a:pt x="5936938" y="388184"/>
+                  </a:lnTo>
+                  <a:lnTo>
+                    <a:pt x="6025549" y="389302"/>
+                  </a:lnTo>
+                  <a:lnTo>
+                    <a:pt x="6114160" y="390383"/>
+                  </a:lnTo>
+                  <a:lnTo>
+                    <a:pt x="6202771" y="391430"/>
+                  </a:lnTo>
+                  <a:lnTo>
+                    <a:pt x="6291382" y="392448"/>
+                  </a:lnTo>
+                  <a:lnTo>
+                    <a:pt x="6379993" y="393437"/>
+                  </a:lnTo>
+                  <a:lnTo>
+                    <a:pt x="6468604" y="394401"/>
+                  </a:lnTo>
+                  <a:lnTo>
+                    <a:pt x="6557215" y="395341"/>
+                  </a:lnTo>
+                  <a:lnTo>
+                    <a:pt x="6645826" y="396259"/>
+                  </a:lnTo>
+                  <a:lnTo>
+                    <a:pt x="6734437" y="397158"/>
+                  </a:lnTo>
+                  <a:lnTo>
+                    <a:pt x="6823048" y="398037"/>
+                  </a:lnTo>
+                  <a:lnTo>
+                    <a:pt x="6911659" y="398900"/>
+                  </a:lnTo>
+                  <a:lnTo>
+                    <a:pt x="7000270" y="399746"/>
+                  </a:lnTo>
+                  <a:lnTo>
+                    <a:pt x="7000270" y="717642"/>
+                  </a:lnTo>
+                  <a:lnTo>
+                    <a:pt x="6911659" y="709125"/>
+                  </a:lnTo>
+                  <a:lnTo>
+                    <a:pt x="6823048" y="700623"/>
+                  </a:lnTo>
+                  <a:lnTo>
+                    <a:pt x="6734437" y="692139"/>
+                  </a:lnTo>
+                  <a:lnTo>
+                    <a:pt x="6645826" y="683674"/>
+                  </a:lnTo>
+                  <a:lnTo>
+                    <a:pt x="6557215" y="675228"/>
+                  </a:lnTo>
+                  <a:lnTo>
+                    <a:pt x="6468604" y="666804"/>
+                  </a:lnTo>
+                  <a:lnTo>
+                    <a:pt x="6379993" y="658404"/>
+                  </a:lnTo>
+                  <a:lnTo>
+                    <a:pt x="6291382" y="650030"/>
+                  </a:lnTo>
+                  <a:lnTo>
+                    <a:pt x="6202771" y="641683"/>
+                  </a:lnTo>
+                  <a:lnTo>
+                    <a:pt x="6114160" y="633367"/>
+                  </a:lnTo>
+                  <a:lnTo>
+                    <a:pt x="6025549" y="625085"/>
+                  </a:lnTo>
+                  <a:lnTo>
+                    <a:pt x="5936938" y="616838"/>
+                  </a:lnTo>
+                  <a:lnTo>
+                    <a:pt x="5848327" y="608632"/>
+                  </a:lnTo>
+                  <a:lnTo>
+                    <a:pt x="5759716" y="600469"/>
+                  </a:lnTo>
+                  <a:lnTo>
+                    <a:pt x="5671105" y="592355"/>
+                  </a:lnTo>
+                  <a:lnTo>
+                    <a:pt x="5582494" y="584294"/>
+                  </a:lnTo>
+                  <a:lnTo>
+                    <a:pt x="5493883" y="576292"/>
+                  </a:lnTo>
+                  <a:lnTo>
+                    <a:pt x="5405272" y="568354"/>
+                  </a:lnTo>
+                  <a:lnTo>
+                    <a:pt x="5316661" y="560489"/>
+                  </a:lnTo>
+                  <a:lnTo>
+                    <a:pt x="5228050" y="552704"/>
+                  </a:lnTo>
+                  <a:lnTo>
+                    <a:pt x="5139439" y="545007"/>
+                  </a:lnTo>
+                  <a:lnTo>
+                    <a:pt x="5050828" y="537409"/>
+                  </a:lnTo>
+                  <a:lnTo>
+                    <a:pt x="4962217" y="529920"/>
+                  </a:lnTo>
+                  <a:lnTo>
+                    <a:pt x="4873606" y="522552"/>
+                  </a:lnTo>
+                  <a:lnTo>
+                    <a:pt x="4784995" y="515319"/>
+                  </a:lnTo>
+                  <a:lnTo>
+                    <a:pt x="4696384" y="508236"/>
+                  </a:lnTo>
+                  <a:lnTo>
+                    <a:pt x="4607773" y="501317"/>
+                  </a:lnTo>
+                  <a:lnTo>
+                    <a:pt x="4519162" y="494580"/>
+                  </a:lnTo>
+                  <a:lnTo>
+                    <a:pt x="4430551" y="488040"/>
+                  </a:lnTo>
+                  <a:lnTo>
+                    <a:pt x="4341940" y="481717"/>
+                  </a:lnTo>
+                  <a:lnTo>
+                    <a:pt x="4253329" y="475627"/>
+                  </a:lnTo>
+                  <a:lnTo>
+                    <a:pt x="4164718" y="469786"/>
+                  </a:lnTo>
+                  <a:lnTo>
+                    <a:pt x="4076107" y="464209"/>
+                  </a:lnTo>
+                  <a:lnTo>
+                    <a:pt x="3987495" y="458907"/>
+                  </a:lnTo>
+                  <a:lnTo>
+                    <a:pt x="3898884" y="453889"/>
+                  </a:lnTo>
+                  <a:lnTo>
+                    <a:pt x="3810273" y="449160"/>
+                  </a:lnTo>
+                  <a:lnTo>
+                    <a:pt x="3721662" y="444721"/>
+                  </a:lnTo>
+                  <a:lnTo>
+                    <a:pt x="3633051" y="440569"/>
+                  </a:lnTo>
+                  <a:lnTo>
+                    <a:pt x="3544440" y="436695"/>
+                  </a:lnTo>
+                  <a:lnTo>
+                    <a:pt x="3455829" y="433088"/>
+                  </a:lnTo>
+                  <a:lnTo>
+                    <a:pt x="3367218" y="429736"/>
+                  </a:lnTo>
+                  <a:lnTo>
+                    <a:pt x="3278607" y="426622"/>
+                  </a:lnTo>
+                  <a:lnTo>
+                    <a:pt x="3189996" y="423730"/>
+                  </a:lnTo>
+                  <a:lnTo>
+                    <a:pt x="3101385" y="421041"/>
+                  </a:lnTo>
+                  <a:lnTo>
+                    <a:pt x="3012774" y="418540"/>
+                  </a:lnTo>
+                  <a:lnTo>
+                    <a:pt x="2924163" y="416208"/>
+                  </a:lnTo>
+                  <a:lnTo>
+                    <a:pt x="2835552" y="414030"/>
+                  </a:lnTo>
+                  <a:lnTo>
+                    <a:pt x="2746941" y="411992"/>
+                  </a:lnTo>
+                  <a:lnTo>
+                    <a:pt x="2658330" y="410080"/>
+                  </a:lnTo>
+                  <a:lnTo>
+                    <a:pt x="2569719" y="408280"/>
+                  </a:lnTo>
+                  <a:lnTo>
+                    <a:pt x="2481108" y="406582"/>
+                  </a:lnTo>
+                  <a:lnTo>
+                    <a:pt x="2392497" y="404976"/>
+                  </a:lnTo>
+                  <a:lnTo>
+                    <a:pt x="2303886" y="403453"/>
+                  </a:lnTo>
+                  <a:lnTo>
+                    <a:pt x="2215275" y="402004"/>
+                  </a:lnTo>
+                  <a:lnTo>
+                    <a:pt x="2126664" y="400622"/>
+                  </a:lnTo>
+                  <a:lnTo>
+                    <a:pt x="2038053" y="399301"/>
+                  </a:lnTo>
+                  <a:lnTo>
+                    <a:pt x="1949442" y="398035"/>
+                  </a:lnTo>
+                  <a:lnTo>
+                    <a:pt x="1860831" y="396818"/>
+                  </a:lnTo>
+                  <a:lnTo>
+                    <a:pt x="1772220" y="395647"/>
+                  </a:lnTo>
+                  <a:lnTo>
+                    <a:pt x="1683609" y="394517"/>
+                  </a:lnTo>
+                  <a:lnTo>
+                    <a:pt x="1594998" y="393425"/>
+                  </a:lnTo>
+                  <a:lnTo>
+                    <a:pt x="1506387" y="392367"/>
+                  </a:lnTo>
+                  <a:lnTo>
+                    <a:pt x="1417776" y="391340"/>
+                  </a:lnTo>
+                  <a:lnTo>
+                    <a:pt x="1329165" y="390342"/>
+                  </a:lnTo>
+                  <a:lnTo>
+                    <a:pt x="1240554" y="389370"/>
+                  </a:lnTo>
+                  <a:lnTo>
+                    <a:pt x="1151943" y="388422"/>
+                  </a:lnTo>
+                  <a:lnTo>
+                    <a:pt x="1063332" y="387497"/>
+                  </a:lnTo>
+                  <a:lnTo>
+                    <a:pt x="974721" y="386593"/>
+                  </a:lnTo>
+                  <a:lnTo>
+                    <a:pt x="886110" y="385707"/>
+                  </a:lnTo>
+                  <a:lnTo>
+                    <a:pt x="797499" y="384839"/>
+                  </a:lnTo>
+                  <a:lnTo>
+                    <a:pt x="708888" y="383988"/>
+                  </a:lnTo>
+                  <a:lnTo>
+                    <a:pt x="620277" y="383152"/>
+                  </a:lnTo>
+                  <a:lnTo>
+                    <a:pt x="531666" y="382329"/>
+                  </a:lnTo>
+                  <a:lnTo>
+                    <a:pt x="443055" y="381520"/>
+                  </a:lnTo>
+                  <a:lnTo>
+                    <a:pt x="354444" y="380724"/>
+                  </a:lnTo>
+                  <a:lnTo>
+                    <a:pt x="265833" y="379939"/>
+                  </a:lnTo>
+                  <a:lnTo>
+                    <a:pt x="177222" y="379164"/>
+                  </a:lnTo>
+                  <a:lnTo>
+                    <a:pt x="88611" y="378400"/>
+                  </a:lnTo>
+                  <a:lnTo>
+                    <a:pt x="0" y="377645"/>
                   </a:lnTo>
                   <a:close/>
                 </a:path>
@@ -14726,258 +14691,258 @@
         </p:sp>
         <p:sp>
           <p:nvSpPr>
-            <p:cNvPr id="343" name="pl343"/>
-            <p:cNvSpPr/>
-            <p:nvPr/>
-          </p:nvSpPr>
-          <p:spPr>
-            <a:xfrm>
-              <a:off x="1266926" y="2720832"/>
-              <a:ext cx="7000270" cy="383593"/>
+            <p:cNvPr id="342" name="pl342"/>
+            <p:cNvSpPr/>
+            <p:nvPr/>
+          </p:nvSpPr>
+          <p:spPr>
+            <a:xfrm>
+              <a:off x="1266926" y="2709643"/>
+              <a:ext cx="7000270" cy="399746"/>
             </a:xfrm>
             <a:custGeom>
               <a:avLst/>
               <a:pathLst>
-                <a:path w="7000270" h="383593">
+                <a:path w="7000270" h="399746">
                   <a:moveTo>
                     <a:pt x="0" y="0"/>
                   </a:moveTo>
                   <a:lnTo>
-                    <a:pt x="88611" y="8396"/>
-                  </a:lnTo>
-                  <a:lnTo>
-                    <a:pt x="177222" y="16784"/>
-                  </a:lnTo>
-                  <a:lnTo>
-                    <a:pt x="265833" y="25161"/>
-                  </a:lnTo>
-                  <a:lnTo>
-                    <a:pt x="354444" y="33527"/>
-                  </a:lnTo>
-                  <a:lnTo>
-                    <a:pt x="443055" y="41882"/>
-                  </a:lnTo>
-                  <a:lnTo>
-                    <a:pt x="531666" y="50225"/>
-                  </a:lnTo>
-                  <a:lnTo>
-                    <a:pt x="620277" y="58554"/>
-                  </a:lnTo>
-                  <a:lnTo>
-                    <a:pt x="708888" y="66869"/>
-                  </a:lnTo>
-                  <a:lnTo>
-                    <a:pt x="797499" y="75169"/>
-                  </a:lnTo>
-                  <a:lnTo>
-                    <a:pt x="886110" y="83452"/>
-                  </a:lnTo>
-                  <a:lnTo>
-                    <a:pt x="974721" y="91718"/>
-                  </a:lnTo>
-                  <a:lnTo>
-                    <a:pt x="1063332" y="99964"/>
-                  </a:lnTo>
-                  <a:lnTo>
-                    <a:pt x="1151943" y="108190"/>
-                  </a:lnTo>
-                  <a:lnTo>
-                    <a:pt x="1240554" y="116393"/>
-                  </a:lnTo>
-                  <a:lnTo>
-                    <a:pt x="1329165" y="124572"/>
-                  </a:lnTo>
-                  <a:lnTo>
-                    <a:pt x="1417776" y="132724"/>
-                  </a:lnTo>
-                  <a:lnTo>
-                    <a:pt x="1506387" y="140847"/>
-                  </a:lnTo>
-                  <a:lnTo>
-                    <a:pt x="1594998" y="148939"/>
-                  </a:lnTo>
-                  <a:lnTo>
-                    <a:pt x="1683609" y="156997"/>
-                  </a:lnTo>
-                  <a:lnTo>
-                    <a:pt x="1772220" y="165016"/>
-                  </a:lnTo>
-                  <a:lnTo>
-                    <a:pt x="1860831" y="172995"/>
-                  </a:lnTo>
-                  <a:lnTo>
-                    <a:pt x="1949442" y="180928"/>
-                  </a:lnTo>
-                  <a:lnTo>
-                    <a:pt x="2038053" y="188811"/>
-                  </a:lnTo>
-                  <a:lnTo>
-                    <a:pt x="2126664" y="196638"/>
-                  </a:lnTo>
-                  <a:lnTo>
-                    <a:pt x="2215275" y="204405"/>
-                  </a:lnTo>
-                  <a:lnTo>
-                    <a:pt x="2303886" y="212103"/>
-                  </a:lnTo>
-                  <a:lnTo>
-                    <a:pt x="2392497" y="219728"/>
-                  </a:lnTo>
-                  <a:lnTo>
-                    <a:pt x="2481108" y="227269"/>
-                  </a:lnTo>
-                  <a:lnTo>
-                    <a:pt x="2569719" y="234718"/>
-                  </a:lnTo>
-                  <a:lnTo>
-                    <a:pt x="2658330" y="242064"/>
-                  </a:lnTo>
-                  <a:lnTo>
-                    <a:pt x="2746941" y="249297"/>
-                  </a:lnTo>
-                  <a:lnTo>
-                    <a:pt x="2835552" y="256404"/>
-                  </a:lnTo>
-                  <a:lnTo>
-                    <a:pt x="2924163" y="263371"/>
-                  </a:lnTo>
-                  <a:lnTo>
-                    <a:pt x="3012774" y="270184"/>
-                  </a:lnTo>
-                  <a:lnTo>
-                    <a:pt x="3101385" y="276826"/>
-                  </a:lnTo>
-                  <a:lnTo>
-                    <a:pt x="3189996" y="283280"/>
-                  </a:lnTo>
-                  <a:lnTo>
-                    <a:pt x="3278607" y="289531"/>
-                  </a:lnTo>
-                  <a:lnTo>
-                    <a:pt x="3367218" y="295560"/>
-                  </a:lnTo>
-                  <a:lnTo>
-                    <a:pt x="3455829" y="301350"/>
-                  </a:lnTo>
-                  <a:lnTo>
-                    <a:pt x="3544440" y="306887"/>
-                  </a:lnTo>
-                  <a:lnTo>
-                    <a:pt x="3633051" y="312157"/>
-                  </a:lnTo>
-                  <a:lnTo>
-                    <a:pt x="3721662" y="317149"/>
-                  </a:lnTo>
-                  <a:lnTo>
-                    <a:pt x="3810273" y="321856"/>
-                  </a:lnTo>
-                  <a:lnTo>
-                    <a:pt x="3898884" y="326276"/>
-                  </a:lnTo>
-                  <a:lnTo>
-                    <a:pt x="3987495" y="330408"/>
-                  </a:lnTo>
-                  <a:lnTo>
-                    <a:pt x="4076107" y="334258"/>
-                  </a:lnTo>
-                  <a:lnTo>
-                    <a:pt x="4164718" y="337834"/>
-                  </a:lnTo>
-                  <a:lnTo>
-                    <a:pt x="4253329" y="341150"/>
-                  </a:lnTo>
-                  <a:lnTo>
-                    <a:pt x="4341940" y="344219"/>
-                  </a:lnTo>
-                  <a:lnTo>
-                    <a:pt x="4430551" y="347057"/>
-                  </a:lnTo>
-                  <a:lnTo>
-                    <a:pt x="4519162" y="349682"/>
-                  </a:lnTo>
-                  <a:lnTo>
-                    <a:pt x="4607773" y="352110"/>
-                  </a:lnTo>
-                  <a:lnTo>
-                    <a:pt x="4696384" y="354359"/>
-                  </a:lnTo>
-                  <a:lnTo>
-                    <a:pt x="4784995" y="356444"/>
-                  </a:lnTo>
-                  <a:lnTo>
-                    <a:pt x="4873606" y="358383"/>
-                  </a:lnTo>
-                  <a:lnTo>
-                    <a:pt x="4962217" y="360187"/>
-                  </a:lnTo>
-                  <a:lnTo>
-                    <a:pt x="5050828" y="361872"/>
-                  </a:lnTo>
-                  <a:lnTo>
-                    <a:pt x="5139439" y="363448"/>
-                  </a:lnTo>
-                  <a:lnTo>
-                    <a:pt x="5228050" y="364927"/>
-                  </a:lnTo>
-                  <a:lnTo>
-                    <a:pt x="5316661" y="366318"/>
-                  </a:lnTo>
-                  <a:lnTo>
-                    <a:pt x="5405272" y="367630"/>
-                  </a:lnTo>
-                  <a:lnTo>
-                    <a:pt x="5493883" y="368871"/>
-                  </a:lnTo>
-                  <a:lnTo>
-                    <a:pt x="5582494" y="370047"/>
-                  </a:lnTo>
-                  <a:lnTo>
-                    <a:pt x="5671105" y="371165"/>
-                  </a:lnTo>
-                  <a:lnTo>
-                    <a:pt x="5759716" y="372230"/>
-                  </a:lnTo>
-                  <a:lnTo>
-                    <a:pt x="5848327" y="373247"/>
-                  </a:lnTo>
-                  <a:lnTo>
-                    <a:pt x="5936938" y="374221"/>
-                  </a:lnTo>
-                  <a:lnTo>
-                    <a:pt x="6025549" y="375155"/>
-                  </a:lnTo>
-                  <a:lnTo>
-                    <a:pt x="6114160" y="376053"/>
-                  </a:lnTo>
-                  <a:lnTo>
-                    <a:pt x="6202771" y="376917"/>
-                  </a:lnTo>
-                  <a:lnTo>
-                    <a:pt x="6291382" y="377752"/>
-                  </a:lnTo>
-                  <a:lnTo>
-                    <a:pt x="6379993" y="378559"/>
-                  </a:lnTo>
-                  <a:lnTo>
-                    <a:pt x="6468604" y="379340"/>
-                  </a:lnTo>
-                  <a:lnTo>
-                    <a:pt x="6557215" y="380098"/>
-                  </a:lnTo>
-                  <a:lnTo>
-                    <a:pt x="6645826" y="380834"/>
-                  </a:lnTo>
-                  <a:lnTo>
-                    <a:pt x="6734437" y="381550"/>
-                  </a:lnTo>
-                  <a:lnTo>
-                    <a:pt x="6823048" y="382248"/>
-                  </a:lnTo>
-                  <a:lnTo>
-                    <a:pt x="6911659" y="382928"/>
-                  </a:lnTo>
-                  <a:lnTo>
-                    <a:pt x="7000270" y="383593"/>
+                    <a:pt x="88611" y="8608"/>
+                  </a:lnTo>
+                  <a:lnTo>
+                    <a:pt x="177222" y="17208"/>
+                  </a:lnTo>
+                  <a:lnTo>
+                    <a:pt x="265833" y="25797"/>
+                  </a:lnTo>
+                  <a:lnTo>
+                    <a:pt x="354444" y="34376"/>
+                  </a:lnTo>
+                  <a:lnTo>
+                    <a:pt x="443055" y="42943"/>
+                  </a:lnTo>
+                  <a:lnTo>
+                    <a:pt x="531666" y="51498"/>
+                  </a:lnTo>
+                  <a:lnTo>
+                    <a:pt x="620277" y="60040"/>
+                  </a:lnTo>
+                  <a:lnTo>
+                    <a:pt x="708888" y="68568"/>
+                  </a:lnTo>
+                  <a:lnTo>
+                    <a:pt x="797499" y="77080"/>
+                  </a:lnTo>
+                  <a:lnTo>
+                    <a:pt x="886110" y="85576"/>
+                  </a:lnTo>
+                  <a:lnTo>
+                    <a:pt x="974721" y="94054"/>
+                  </a:lnTo>
+                  <a:lnTo>
+                    <a:pt x="1063332" y="102514"/>
+                  </a:lnTo>
+                  <a:lnTo>
+                    <a:pt x="1151943" y="110952"/>
+                  </a:lnTo>
+                  <a:lnTo>
+                    <a:pt x="1240554" y="119368"/>
+                  </a:lnTo>
+                  <a:lnTo>
+                    <a:pt x="1329165" y="127761"/>
+                  </a:lnTo>
+                  <a:lnTo>
+                    <a:pt x="1417776" y="136126"/>
+                  </a:lnTo>
+                  <a:lnTo>
+                    <a:pt x="1506387" y="144463"/>
+                  </a:lnTo>
+                  <a:lnTo>
+                    <a:pt x="1594998" y="152769"/>
+                  </a:lnTo>
+                  <a:lnTo>
+                    <a:pt x="1683609" y="161040"/>
+                  </a:lnTo>
+                  <a:lnTo>
+                    <a:pt x="1772220" y="169274"/>
+                  </a:lnTo>
+                  <a:lnTo>
+                    <a:pt x="1860831" y="177467"/>
+                  </a:lnTo>
+                  <a:lnTo>
+                    <a:pt x="1949442" y="185614"/>
+                  </a:lnTo>
+                  <a:lnTo>
+                    <a:pt x="2038053" y="193712"/>
+                  </a:lnTo>
+                  <a:lnTo>
+                    <a:pt x="2126664" y="201755"/>
+                  </a:lnTo>
+                  <a:lnTo>
+                    <a:pt x="2215275" y="209737"/>
+                  </a:lnTo>
+                  <a:lnTo>
+                    <a:pt x="2303886" y="217652"/>
+                  </a:lnTo>
+                  <a:lnTo>
+                    <a:pt x="2392497" y="225492"/>
+                  </a:lnTo>
+                  <a:lnTo>
+                    <a:pt x="2481108" y="233250"/>
+                  </a:lnTo>
+                  <a:lnTo>
+                    <a:pt x="2569719" y="240916"/>
+                  </a:lnTo>
+                  <a:lnTo>
+                    <a:pt x="2658330" y="248480"/>
+                  </a:lnTo>
+                  <a:lnTo>
+                    <a:pt x="2746941" y="255932"/>
+                  </a:lnTo>
+                  <a:lnTo>
+                    <a:pt x="2835552" y="263257"/>
+                  </a:lnTo>
+                  <a:lnTo>
+                    <a:pt x="2924163" y="270443"/>
+                  </a:lnTo>
+                  <a:lnTo>
+                    <a:pt x="3012774" y="277476"/>
+                  </a:lnTo>
+                  <a:lnTo>
+                    <a:pt x="3101385" y="284338"/>
+                  </a:lnTo>
+                  <a:lnTo>
+                    <a:pt x="3189996" y="291013"/>
+                  </a:lnTo>
+                  <a:lnTo>
+                    <a:pt x="3278607" y="297485"/>
+                  </a:lnTo>
+                  <a:lnTo>
+                    <a:pt x="3367218" y="303735"/>
+                  </a:lnTo>
+                  <a:lnTo>
+                    <a:pt x="3455829" y="309746"/>
+                  </a:lnTo>
+                  <a:lnTo>
+                    <a:pt x="3544440" y="315504"/>
+                  </a:lnTo>
+                  <a:lnTo>
+                    <a:pt x="3633051" y="320994"/>
+                  </a:lnTo>
+                  <a:lnTo>
+                    <a:pt x="3721662" y="326205"/>
+                  </a:lnTo>
+                  <a:lnTo>
+                    <a:pt x="3810273" y="331130"/>
+                  </a:lnTo>
+                  <a:lnTo>
+                    <a:pt x="3898884" y="335765"/>
+                  </a:lnTo>
+                  <a:lnTo>
+                    <a:pt x="3987495" y="340111"/>
+                  </a:lnTo>
+                  <a:lnTo>
+                    <a:pt x="4076107" y="344173"/>
+                  </a:lnTo>
+                  <a:lnTo>
+                    <a:pt x="4164718" y="347959"/>
+                  </a:lnTo>
+                  <a:lnTo>
+                    <a:pt x="4253329" y="351482"/>
+                  </a:lnTo>
+                  <a:lnTo>
+                    <a:pt x="4341940" y="354756"/>
+                  </a:lnTo>
+                  <a:lnTo>
+                    <a:pt x="4430551" y="357796"/>
+                  </a:lnTo>
+                  <a:lnTo>
+                    <a:pt x="4519162" y="360621"/>
+                  </a:lnTo>
+                  <a:lnTo>
+                    <a:pt x="4607773" y="363247"/>
+                  </a:lnTo>
+                  <a:lnTo>
+                    <a:pt x="4696384" y="365693"/>
+                  </a:lnTo>
+                  <a:lnTo>
+                    <a:pt x="4784995" y="367973"/>
+                  </a:lnTo>
+                  <a:lnTo>
+                    <a:pt x="4873606" y="370104"/>
+                  </a:lnTo>
+                  <a:lnTo>
+                    <a:pt x="4962217" y="372100"/>
+                  </a:lnTo>
+                  <a:lnTo>
+                    <a:pt x="5050828" y="373975"/>
+                  </a:lnTo>
+                  <a:lnTo>
+                    <a:pt x="5139439" y="375741"/>
+                  </a:lnTo>
+                  <a:lnTo>
+                    <a:pt x="5228050" y="377408"/>
+                  </a:lnTo>
+                  <a:lnTo>
+                    <a:pt x="5316661" y="378986"/>
+                  </a:lnTo>
+                  <a:lnTo>
+                    <a:pt x="5405272" y="380485"/>
+                  </a:lnTo>
+                  <a:lnTo>
+                    <a:pt x="5493883" y="381911"/>
+                  </a:lnTo>
+                  <a:lnTo>
+                    <a:pt x="5582494" y="383273"/>
+                  </a:lnTo>
+                  <a:lnTo>
+                    <a:pt x="5671105" y="384576"/>
+                  </a:lnTo>
+                  <a:lnTo>
+                    <a:pt x="5759716" y="385825"/>
+                  </a:lnTo>
+                  <a:lnTo>
+                    <a:pt x="5848327" y="387027"/>
+                  </a:lnTo>
+                  <a:lnTo>
+                    <a:pt x="5936938" y="388184"/>
+                  </a:lnTo>
+                  <a:lnTo>
+                    <a:pt x="6025549" y="389302"/>
+                  </a:lnTo>
+                  <a:lnTo>
+                    <a:pt x="6114160" y="390383"/>
+                  </a:lnTo>
+                  <a:lnTo>
+                    <a:pt x="6202771" y="391430"/>
+                  </a:lnTo>
+                  <a:lnTo>
+                    <a:pt x="6291382" y="392448"/>
+                  </a:lnTo>
+                  <a:lnTo>
+                    <a:pt x="6379993" y="393437"/>
+                  </a:lnTo>
+                  <a:lnTo>
+                    <a:pt x="6468604" y="394401"/>
+                  </a:lnTo>
+                  <a:lnTo>
+                    <a:pt x="6557215" y="395341"/>
+                  </a:lnTo>
+                  <a:lnTo>
+                    <a:pt x="6645826" y="396259"/>
+                  </a:lnTo>
+                  <a:lnTo>
+                    <a:pt x="6734437" y="397158"/>
+                  </a:lnTo>
+                  <a:lnTo>
+                    <a:pt x="6823048" y="398037"/>
+                  </a:lnTo>
+                  <a:lnTo>
+                    <a:pt x="6911659" y="398900"/>
+                  </a:lnTo>
+                  <a:lnTo>
+                    <a:pt x="7000270" y="399746"/>
                   </a:lnTo>
                 </a:path>
               </a:pathLst>
@@ -14991,255 +14956,255 @@
         </p:sp>
         <p:sp>
           <p:nvSpPr>
-            <p:cNvPr id="344" name="pl344"/>
-            <p:cNvSpPr/>
-            <p:nvPr/>
-          </p:nvSpPr>
-          <p:spPr>
-            <a:xfrm>
-              <a:off x="1266926" y="3096624"/>
-              <a:ext cx="7000270" cy="325163"/>
+            <p:cNvPr id="343" name="pl343"/>
+            <p:cNvSpPr/>
+            <p:nvPr/>
+          </p:nvSpPr>
+          <p:spPr>
+            <a:xfrm>
+              <a:off x="1266926" y="3087288"/>
+              <a:ext cx="7000270" cy="339997"/>
             </a:xfrm>
             <a:custGeom>
               <a:avLst/>
               <a:pathLst>
-                <a:path w="7000270" h="325163">
+                <a:path w="7000270" h="339997">
                   <a:moveTo>
-                    <a:pt x="7000270" y="325163"/>
+                    <a:pt x="7000270" y="339997"/>
                   </a:moveTo>
                   <a:lnTo>
-                    <a:pt x="6911659" y="316856"/>
-                  </a:lnTo>
-                  <a:lnTo>
-                    <a:pt x="6823048" y="308565"/>
-                  </a:lnTo>
-                  <a:lnTo>
-                    <a:pt x="6734437" y="300291"/>
-                  </a:lnTo>
-                  <a:lnTo>
-                    <a:pt x="6645826" y="292036"/>
-                  </a:lnTo>
-                  <a:lnTo>
-                    <a:pt x="6557215" y="283801"/>
-                  </a:lnTo>
-                  <a:lnTo>
-                    <a:pt x="6468604" y="275587"/>
-                  </a:lnTo>
-                  <a:lnTo>
-                    <a:pt x="6379993" y="267396"/>
-                  </a:lnTo>
-                  <a:lnTo>
-                    <a:pt x="6291382" y="259232"/>
-                  </a:lnTo>
-                  <a:lnTo>
-                    <a:pt x="6202771" y="251095"/>
-                  </a:lnTo>
-                  <a:lnTo>
-                    <a:pt x="6114160" y="242988"/>
-                  </a:lnTo>
-                  <a:lnTo>
-                    <a:pt x="6025549" y="234914"/>
-                  </a:lnTo>
-                  <a:lnTo>
-                    <a:pt x="5936938" y="226876"/>
-                  </a:lnTo>
-                  <a:lnTo>
-                    <a:pt x="5848327" y="218878"/>
-                  </a:lnTo>
-                  <a:lnTo>
-                    <a:pt x="5759716" y="210924"/>
-                  </a:lnTo>
-                  <a:lnTo>
-                    <a:pt x="5671105" y="203017"/>
-                  </a:lnTo>
-                  <a:lnTo>
-                    <a:pt x="5582494" y="195164"/>
-                  </a:lnTo>
-                  <a:lnTo>
-                    <a:pt x="5493883" y="187368"/>
-                  </a:lnTo>
-                  <a:lnTo>
-                    <a:pt x="5405272" y="179637"/>
-                  </a:lnTo>
-                  <a:lnTo>
-                    <a:pt x="5316661" y="171977"/>
-                  </a:lnTo>
-                  <a:lnTo>
-                    <a:pt x="5228050" y="164397"/>
-                  </a:lnTo>
-                  <a:lnTo>
-                    <a:pt x="5139439" y="156904"/>
-                  </a:lnTo>
-                  <a:lnTo>
-                    <a:pt x="5050828" y="149509"/>
-                  </a:lnTo>
-                  <a:lnTo>
-                    <a:pt x="4962217" y="142222"/>
-                  </a:lnTo>
-                  <a:lnTo>
-                    <a:pt x="4873606" y="135055"/>
-                  </a:lnTo>
-                  <a:lnTo>
-                    <a:pt x="4784995" y="128022"/>
-                  </a:lnTo>
-                  <a:lnTo>
-                    <a:pt x="4696384" y="121136"/>
-                  </a:lnTo>
-                  <a:lnTo>
-                    <a:pt x="4607773" y="114413"/>
-                  </a:lnTo>
-                  <a:lnTo>
-                    <a:pt x="4519162" y="107870"/>
-                  </a:lnTo>
-                  <a:lnTo>
-                    <a:pt x="4430551" y="101523"/>
-                  </a:lnTo>
-                  <a:lnTo>
-                    <a:pt x="4341940" y="95389"/>
-                  </a:lnTo>
-                  <a:lnTo>
-                    <a:pt x="4253329" y="89486"/>
-                  </a:lnTo>
-                  <a:lnTo>
-                    <a:pt x="4164718" y="83830"/>
-                  </a:lnTo>
-                  <a:lnTo>
-                    <a:pt x="4076107" y="78436"/>
-                  </a:lnTo>
-                  <a:lnTo>
-                    <a:pt x="3987495" y="73314"/>
-                  </a:lnTo>
-                  <a:lnTo>
-                    <a:pt x="3898884" y="68474"/>
-                  </a:lnTo>
-                  <a:lnTo>
-                    <a:pt x="3810273" y="63922"/>
-                  </a:lnTo>
-                  <a:lnTo>
-                    <a:pt x="3721662" y="59658"/>
-                  </a:lnTo>
-                  <a:lnTo>
-                    <a:pt x="3633051" y="55678"/>
-                  </a:lnTo>
-                  <a:lnTo>
-                    <a:pt x="3544440" y="51976"/>
-                  </a:lnTo>
-                  <a:lnTo>
-                    <a:pt x="3455829" y="48542"/>
-                  </a:lnTo>
-                  <a:lnTo>
-                    <a:pt x="3367218" y="45361"/>
-                  </a:lnTo>
-                  <a:lnTo>
-                    <a:pt x="3278607" y="42418"/>
-                  </a:lnTo>
-                  <a:lnTo>
-                    <a:pt x="3189996" y="39697"/>
-                  </a:lnTo>
-                  <a:lnTo>
-                    <a:pt x="3101385" y="37180"/>
-                  </a:lnTo>
-                  <a:lnTo>
-                    <a:pt x="3012774" y="34850"/>
-                  </a:lnTo>
-                  <a:lnTo>
-                    <a:pt x="2924163" y="32691"/>
-                  </a:lnTo>
-                  <a:lnTo>
-                    <a:pt x="2835552" y="30687"/>
-                  </a:lnTo>
-                  <a:lnTo>
-                    <a:pt x="2746941" y="28822"/>
-                  </a:lnTo>
-                  <a:lnTo>
-                    <a:pt x="2658330" y="27083"/>
-                  </a:lnTo>
-                  <a:lnTo>
-                    <a:pt x="2569719" y="25458"/>
-                  </a:lnTo>
-                  <a:lnTo>
-                    <a:pt x="2481108" y="23935"/>
-                  </a:lnTo>
-                  <a:lnTo>
-                    <a:pt x="2392497" y="22505"/>
-                  </a:lnTo>
-                  <a:lnTo>
-                    <a:pt x="2303886" y="21157"/>
-                  </a:lnTo>
-                  <a:lnTo>
-                    <a:pt x="2215275" y="19885"/>
-                  </a:lnTo>
-                  <a:lnTo>
-                    <a:pt x="2126664" y="18680"/>
-                  </a:lnTo>
-                  <a:lnTo>
-                    <a:pt x="2038053" y="17536"/>
-                  </a:lnTo>
-                  <a:lnTo>
-                    <a:pt x="1949442" y="16447"/>
-                  </a:lnTo>
-                  <a:lnTo>
-                    <a:pt x="1860831" y="15408"/>
-                  </a:lnTo>
-                  <a:lnTo>
-                    <a:pt x="1772220" y="14415"/>
-                  </a:lnTo>
-                  <a:lnTo>
-                    <a:pt x="1683609" y="13463"/>
-                  </a:lnTo>
-                  <a:lnTo>
-                    <a:pt x="1594998" y="12549"/>
-                  </a:lnTo>
-                  <a:lnTo>
-                    <a:pt x="1506387" y="11669"/>
-                  </a:lnTo>
-                  <a:lnTo>
-                    <a:pt x="1417776" y="10821"/>
-                  </a:lnTo>
-                  <a:lnTo>
-                    <a:pt x="1329165" y="10002"/>
-                  </a:lnTo>
-                  <a:lnTo>
-                    <a:pt x="1240554" y="9209"/>
-                  </a:lnTo>
-                  <a:lnTo>
-                    <a:pt x="1151943" y="8440"/>
-                  </a:lnTo>
-                  <a:lnTo>
-                    <a:pt x="1063332" y="7694"/>
-                  </a:lnTo>
-                  <a:lnTo>
-                    <a:pt x="974721" y="6969"/>
-                  </a:lnTo>
-                  <a:lnTo>
-                    <a:pt x="886110" y="6263"/>
-                  </a:lnTo>
-                  <a:lnTo>
-                    <a:pt x="797499" y="5575"/>
-                  </a:lnTo>
-                  <a:lnTo>
-                    <a:pt x="708888" y="4903"/>
-                  </a:lnTo>
-                  <a:lnTo>
-                    <a:pt x="620277" y="4246"/>
-                  </a:lnTo>
-                  <a:lnTo>
-                    <a:pt x="531666" y="3604"/>
-                  </a:lnTo>
-                  <a:lnTo>
-                    <a:pt x="443055" y="2975"/>
-                  </a:lnTo>
-                  <a:lnTo>
-                    <a:pt x="354444" y="2358"/>
-                  </a:lnTo>
-                  <a:lnTo>
-                    <a:pt x="265833" y="1753"/>
-                  </a:lnTo>
-                  <a:lnTo>
-                    <a:pt x="177222" y="1159"/>
-                  </a:lnTo>
-                  <a:lnTo>
-                    <a:pt x="88611" y="574"/>
+                    <a:pt x="6911659" y="331479"/>
+                  </a:lnTo>
+                  <a:lnTo>
+                    <a:pt x="6823048" y="322978"/>
+                  </a:lnTo>
+                  <a:lnTo>
+                    <a:pt x="6734437" y="314494"/>
+                  </a:lnTo>
+                  <a:lnTo>
+                    <a:pt x="6645826" y="306028"/>
+                  </a:lnTo>
+                  <a:lnTo>
+                    <a:pt x="6557215" y="297583"/>
+                  </a:lnTo>
+                  <a:lnTo>
+                    <a:pt x="6468604" y="289159"/>
+                  </a:lnTo>
+                  <a:lnTo>
+                    <a:pt x="6379993" y="280759"/>
+                  </a:lnTo>
+                  <a:lnTo>
+                    <a:pt x="6291382" y="272384"/>
+                  </a:lnTo>
+                  <a:lnTo>
+                    <a:pt x="6202771" y="264038"/>
+                  </a:lnTo>
+                  <a:lnTo>
+                    <a:pt x="6114160" y="255722"/>
+                  </a:lnTo>
+                  <a:lnTo>
+                    <a:pt x="6025549" y="247439"/>
+                  </a:lnTo>
+                  <a:lnTo>
+                    <a:pt x="5936938" y="239193"/>
+                  </a:lnTo>
+                  <a:lnTo>
+                    <a:pt x="5848327" y="230986"/>
+                  </a:lnTo>
+                  <a:lnTo>
+                    <a:pt x="5759716" y="222824"/>
+                  </a:lnTo>
+                  <a:lnTo>
+                    <a:pt x="5671105" y="214709"/>
+                  </a:lnTo>
+                  <a:lnTo>
+                    <a:pt x="5582494" y="206648"/>
+                  </a:lnTo>
+                  <a:lnTo>
+                    <a:pt x="5493883" y="198646"/>
+                  </a:lnTo>
+                  <a:lnTo>
+                    <a:pt x="5405272" y="190709"/>
+                  </a:lnTo>
+                  <a:lnTo>
+                    <a:pt x="5316661" y="182844"/>
+                  </a:lnTo>
+                  <a:lnTo>
+                    <a:pt x="5228050" y="175058"/>
+                  </a:lnTo>
+                  <a:lnTo>
+                    <a:pt x="5139439" y="167361"/>
+                  </a:lnTo>
+                  <a:lnTo>
+                    <a:pt x="5050828" y="159763"/>
+                  </a:lnTo>
+                  <a:lnTo>
+                    <a:pt x="4962217" y="152274"/>
+                  </a:lnTo>
+                  <a:lnTo>
+                    <a:pt x="4873606" y="144907"/>
+                  </a:lnTo>
+                  <a:lnTo>
+                    <a:pt x="4784995" y="137674"/>
+                  </a:lnTo>
+                  <a:lnTo>
+                    <a:pt x="4696384" y="130590"/>
+                  </a:lnTo>
+                  <a:lnTo>
+                    <a:pt x="4607773" y="123672"/>
+                  </a:lnTo>
+                  <a:lnTo>
+                    <a:pt x="4519162" y="116934"/>
+                  </a:lnTo>
+                  <a:lnTo>
+                    <a:pt x="4430551" y="110395"/>
+                  </a:lnTo>
+                  <a:lnTo>
+                    <a:pt x="4341940" y="104072"/>
+                  </a:lnTo>
+                  <a:lnTo>
+                    <a:pt x="4253329" y="97982"/>
+                  </a:lnTo>
+                  <a:lnTo>
+                    <a:pt x="4164718" y="92141"/>
+                  </a:lnTo>
+                  <a:lnTo>
+                    <a:pt x="4076107" y="86563"/>
+                  </a:lnTo>
+                  <a:lnTo>
+                    <a:pt x="3987495" y="81261"/>
+                  </a:lnTo>
+                  <a:lnTo>
+                    <a:pt x="3898884" y="76243"/>
+                  </a:lnTo>
+                  <a:lnTo>
+                    <a:pt x="3810273" y="71515"/>
+                  </a:lnTo>
+                  <a:lnTo>
+                    <a:pt x="3721662" y="67076"/>
+                  </a:lnTo>
+                  <a:lnTo>
+                    <a:pt x="3633051" y="62923"/>
+                  </a:lnTo>
+                  <a:lnTo>
+                    <a:pt x="3544440" y="59049"/>
+                  </a:lnTo>
+                  <a:lnTo>
+                    <a:pt x="3455829" y="55443"/>
+                  </a:lnTo>
+                  <a:lnTo>
+                    <a:pt x="3367218" y="52090"/>
+                  </a:lnTo>
+                  <a:lnTo>
+                    <a:pt x="3278607" y="48977"/>
+                  </a:lnTo>
+                  <a:lnTo>
+                    <a:pt x="3189996" y="46084"/>
+                  </a:lnTo>
+                  <a:lnTo>
+                    <a:pt x="3101385" y="43396"/>
+                  </a:lnTo>
+                  <a:lnTo>
+                    <a:pt x="3012774" y="40894"/>
+                  </a:lnTo>
+                  <a:lnTo>
+                    <a:pt x="2924163" y="38562"/>
+                  </a:lnTo>
+                  <a:lnTo>
+                    <a:pt x="2835552" y="36385"/>
+                  </a:lnTo>
+                  <a:lnTo>
+                    <a:pt x="2746941" y="34347"/>
+                  </a:lnTo>
+                  <a:lnTo>
+                    <a:pt x="2658330" y="32434"/>
+                  </a:lnTo>
+                  <a:lnTo>
+                    <a:pt x="2569719" y="30634"/>
+                  </a:lnTo>
+                  <a:lnTo>
+                    <a:pt x="2481108" y="28937"/>
+                  </a:lnTo>
+                  <a:lnTo>
+                    <a:pt x="2392497" y="27331"/>
+                  </a:lnTo>
+                  <a:lnTo>
+                    <a:pt x="2303886" y="25807"/>
+                  </a:lnTo>
+                  <a:lnTo>
+                    <a:pt x="2215275" y="24358"/>
+                  </a:lnTo>
+                  <a:lnTo>
+                    <a:pt x="2126664" y="22977"/>
+                  </a:lnTo>
+                  <a:lnTo>
+                    <a:pt x="2038053" y="21655"/>
+                  </a:lnTo>
+                  <a:lnTo>
+                    <a:pt x="1949442" y="20389"/>
+                  </a:lnTo>
+                  <a:lnTo>
+                    <a:pt x="1860831" y="19173"/>
+                  </a:lnTo>
+                  <a:lnTo>
+                    <a:pt x="1772220" y="18002"/>
+                  </a:lnTo>
+                  <a:lnTo>
+                    <a:pt x="1683609" y="16872"/>
+                  </a:lnTo>
+                  <a:lnTo>
+                    <a:pt x="1594998" y="15779"/>
+                  </a:lnTo>
+                  <a:lnTo>
+                    <a:pt x="1506387" y="14721"/>
+                  </a:lnTo>
+                  <a:lnTo>
+                    <a:pt x="1417776" y="13694"/>
+                  </a:lnTo>
+                  <a:lnTo>
+                    <a:pt x="1329165" y="12696"/>
+                  </a:lnTo>
+                  <a:lnTo>
+                    <a:pt x="1240554" y="11724"/>
+                  </a:lnTo>
+                  <a:lnTo>
+                    <a:pt x="1151943" y="10777"/>
+                  </a:lnTo>
+                  <a:lnTo>
+                    <a:pt x="1063332" y="9852"/>
+                  </a:lnTo>
+                  <a:lnTo>
+                    <a:pt x="974721" y="8947"/>
+                  </a:lnTo>
+                  <a:lnTo>
+                    <a:pt x="886110" y="8062"/>
+                  </a:lnTo>
+                  <a:lnTo>
+                    <a:pt x="797499" y="7194"/>
+                  </a:lnTo>
+                  <a:lnTo>
+                    <a:pt x="708888" y="6342"/>
+                  </a:lnTo>
+                  <a:lnTo>
+                    <a:pt x="620277" y="5506"/>
+                  </a:lnTo>
+                  <a:lnTo>
+                    <a:pt x="531666" y="4684"/>
+                  </a:lnTo>
+                  <a:lnTo>
+                    <a:pt x="443055" y="3875"/>
+                  </a:lnTo>
+                  <a:lnTo>
+                    <a:pt x="354444" y="3078"/>
+                  </a:lnTo>
+                  <a:lnTo>
+                    <a:pt x="265833" y="2293"/>
+                  </a:lnTo>
+                  <a:lnTo>
+                    <a:pt x="177222" y="1519"/>
+                  </a:lnTo>
+                  <a:lnTo>
+                    <a:pt x="88611" y="754"/>
                   </a:lnTo>
                   <a:lnTo>
                     <a:pt x="0" y="0"/>
@@ -15256,258 +15221,258 @@
         </p:sp>
         <p:sp>
           <p:nvSpPr>
-            <p:cNvPr id="345" name="pl345"/>
-            <p:cNvSpPr/>
-            <p:nvPr/>
-          </p:nvSpPr>
-          <p:spPr>
-            <a:xfrm>
-              <a:off x="1266926" y="2908728"/>
-              <a:ext cx="7000270" cy="354378"/>
+            <p:cNvPr id="344" name="pl344"/>
+            <p:cNvSpPr/>
+            <p:nvPr/>
+          </p:nvSpPr>
+          <p:spPr>
+            <a:xfrm>
+              <a:off x="1266926" y="2898465"/>
+              <a:ext cx="7000270" cy="369871"/>
             </a:xfrm>
             <a:custGeom>
               <a:avLst/>
               <a:pathLst>
-                <a:path w="7000270" h="354378">
+                <a:path w="7000270" h="369871">
                   <a:moveTo>
                     <a:pt x="0" y="0"/>
                   </a:moveTo>
                   <a:lnTo>
-                    <a:pt x="88611" y="4485"/>
-                  </a:lnTo>
-                  <a:lnTo>
-                    <a:pt x="177222" y="8971"/>
-                  </a:lnTo>
-                  <a:lnTo>
-                    <a:pt x="265833" y="13457"/>
-                  </a:lnTo>
-                  <a:lnTo>
-                    <a:pt x="354444" y="17943"/>
-                  </a:lnTo>
-                  <a:lnTo>
-                    <a:pt x="443055" y="22429"/>
-                  </a:lnTo>
-                  <a:lnTo>
-                    <a:pt x="531666" y="26914"/>
-                  </a:lnTo>
-                  <a:lnTo>
-                    <a:pt x="620277" y="31400"/>
-                  </a:lnTo>
-                  <a:lnTo>
-                    <a:pt x="708888" y="35886"/>
-                  </a:lnTo>
-                  <a:lnTo>
-                    <a:pt x="797499" y="40372"/>
-                  </a:lnTo>
-                  <a:lnTo>
-                    <a:pt x="886110" y="44858"/>
-                  </a:lnTo>
-                  <a:lnTo>
-                    <a:pt x="974721" y="49343"/>
-                  </a:lnTo>
-                  <a:lnTo>
-                    <a:pt x="1063332" y="53829"/>
-                  </a:lnTo>
-                  <a:lnTo>
-                    <a:pt x="1151943" y="58315"/>
-                  </a:lnTo>
-                  <a:lnTo>
-                    <a:pt x="1240554" y="62801"/>
-                  </a:lnTo>
-                  <a:lnTo>
-                    <a:pt x="1329165" y="67287"/>
-                  </a:lnTo>
-                  <a:lnTo>
-                    <a:pt x="1417776" y="71772"/>
-                  </a:lnTo>
-                  <a:lnTo>
-                    <a:pt x="1506387" y="76258"/>
-                  </a:lnTo>
-                  <a:lnTo>
-                    <a:pt x="1594998" y="80744"/>
-                  </a:lnTo>
-                  <a:lnTo>
-                    <a:pt x="1683609" y="85230"/>
-                  </a:lnTo>
-                  <a:lnTo>
-                    <a:pt x="1772220" y="89716"/>
-                  </a:lnTo>
-                  <a:lnTo>
-                    <a:pt x="1860831" y="94201"/>
-                  </a:lnTo>
-                  <a:lnTo>
-                    <a:pt x="1949442" y="98687"/>
-                  </a:lnTo>
-                  <a:lnTo>
-                    <a:pt x="2038053" y="103173"/>
-                  </a:lnTo>
-                  <a:lnTo>
-                    <a:pt x="2126664" y="107659"/>
-                  </a:lnTo>
-                  <a:lnTo>
-                    <a:pt x="2215275" y="112145"/>
-                  </a:lnTo>
-                  <a:lnTo>
-                    <a:pt x="2303886" y="116630"/>
-                  </a:lnTo>
-                  <a:lnTo>
-                    <a:pt x="2392497" y="121116"/>
-                  </a:lnTo>
-                  <a:lnTo>
-                    <a:pt x="2481108" y="125602"/>
-                  </a:lnTo>
-                  <a:lnTo>
-                    <a:pt x="2569719" y="130088"/>
-                  </a:lnTo>
-                  <a:lnTo>
-                    <a:pt x="2658330" y="134574"/>
-                  </a:lnTo>
-                  <a:lnTo>
-                    <a:pt x="2746941" y="139060"/>
-                  </a:lnTo>
-                  <a:lnTo>
-                    <a:pt x="2835552" y="143545"/>
-                  </a:lnTo>
-                  <a:lnTo>
-                    <a:pt x="2924163" y="148031"/>
-                  </a:lnTo>
-                  <a:lnTo>
-                    <a:pt x="3012774" y="152517"/>
-                  </a:lnTo>
-                  <a:lnTo>
-                    <a:pt x="3101385" y="157003"/>
-                  </a:lnTo>
-                  <a:lnTo>
-                    <a:pt x="3189996" y="161489"/>
-                  </a:lnTo>
-                  <a:lnTo>
-                    <a:pt x="3278607" y="165974"/>
-                  </a:lnTo>
-                  <a:lnTo>
-                    <a:pt x="3367218" y="170460"/>
-                  </a:lnTo>
-                  <a:lnTo>
-                    <a:pt x="3455829" y="174946"/>
-                  </a:lnTo>
-                  <a:lnTo>
-                    <a:pt x="3544440" y="179432"/>
-                  </a:lnTo>
-                  <a:lnTo>
-                    <a:pt x="3633051" y="183918"/>
-                  </a:lnTo>
-                  <a:lnTo>
-                    <a:pt x="3721662" y="188403"/>
-                  </a:lnTo>
-                  <a:lnTo>
-                    <a:pt x="3810273" y="192889"/>
-                  </a:lnTo>
-                  <a:lnTo>
-                    <a:pt x="3898884" y="197375"/>
-                  </a:lnTo>
-                  <a:lnTo>
-                    <a:pt x="3987495" y="201861"/>
-                  </a:lnTo>
-                  <a:lnTo>
-                    <a:pt x="4076107" y="206347"/>
-                  </a:lnTo>
-                  <a:lnTo>
-                    <a:pt x="4164718" y="210832"/>
-                  </a:lnTo>
-                  <a:lnTo>
-                    <a:pt x="4253329" y="215318"/>
-                  </a:lnTo>
-                  <a:lnTo>
-                    <a:pt x="4341940" y="219804"/>
-                  </a:lnTo>
-                  <a:lnTo>
-                    <a:pt x="4430551" y="224290"/>
-                  </a:lnTo>
-                  <a:lnTo>
-                    <a:pt x="4519162" y="228776"/>
-                  </a:lnTo>
-                  <a:lnTo>
-                    <a:pt x="4607773" y="233261"/>
-                  </a:lnTo>
-                  <a:lnTo>
-                    <a:pt x="4696384" y="237747"/>
-                  </a:lnTo>
-                  <a:lnTo>
-                    <a:pt x="4784995" y="242233"/>
-                  </a:lnTo>
-                  <a:lnTo>
-                    <a:pt x="4873606" y="246719"/>
-                  </a:lnTo>
-                  <a:lnTo>
-                    <a:pt x="4962217" y="251205"/>
-                  </a:lnTo>
-                  <a:lnTo>
-                    <a:pt x="5050828" y="255691"/>
-                  </a:lnTo>
-                  <a:lnTo>
-                    <a:pt x="5139439" y="260176"/>
-                  </a:lnTo>
-                  <a:lnTo>
-                    <a:pt x="5228050" y="264662"/>
-                  </a:lnTo>
-                  <a:lnTo>
-                    <a:pt x="5316661" y="269148"/>
-                  </a:lnTo>
-                  <a:lnTo>
-                    <a:pt x="5405272" y="273634"/>
-                  </a:lnTo>
-                  <a:lnTo>
-                    <a:pt x="5493883" y="278120"/>
-                  </a:lnTo>
-                  <a:lnTo>
-                    <a:pt x="5582494" y="282605"/>
-                  </a:lnTo>
-                  <a:lnTo>
-                    <a:pt x="5671105" y="287091"/>
-                  </a:lnTo>
-                  <a:lnTo>
-                    <a:pt x="5759716" y="291577"/>
-                  </a:lnTo>
-                  <a:lnTo>
-                    <a:pt x="5848327" y="296063"/>
-                  </a:lnTo>
-                  <a:lnTo>
-                    <a:pt x="5936938" y="300549"/>
-                  </a:lnTo>
-                  <a:lnTo>
-                    <a:pt x="6025549" y="305034"/>
-                  </a:lnTo>
-                  <a:lnTo>
-                    <a:pt x="6114160" y="309520"/>
-                  </a:lnTo>
-                  <a:lnTo>
-                    <a:pt x="6202771" y="314006"/>
-                  </a:lnTo>
-                  <a:lnTo>
-                    <a:pt x="6291382" y="318492"/>
-                  </a:lnTo>
-                  <a:lnTo>
-                    <a:pt x="6379993" y="322978"/>
-                  </a:lnTo>
-                  <a:lnTo>
-                    <a:pt x="6468604" y="327463"/>
-                  </a:lnTo>
-                  <a:lnTo>
-                    <a:pt x="6557215" y="331949"/>
-                  </a:lnTo>
-                  <a:lnTo>
-                    <a:pt x="6645826" y="336435"/>
-                  </a:lnTo>
-                  <a:lnTo>
-                    <a:pt x="6734437" y="340921"/>
-                  </a:lnTo>
-                  <a:lnTo>
-                    <a:pt x="6823048" y="345407"/>
-                  </a:lnTo>
-                  <a:lnTo>
-                    <a:pt x="6911659" y="349892"/>
-                  </a:lnTo>
-                  <a:lnTo>
-                    <a:pt x="7000270" y="354378"/>
+                    <a:pt x="88611" y="4681"/>
+                  </a:lnTo>
+                  <a:lnTo>
+                    <a:pt x="177222" y="9363"/>
+                  </a:lnTo>
+                  <a:lnTo>
+                    <a:pt x="265833" y="14045"/>
+                  </a:lnTo>
+                  <a:lnTo>
+                    <a:pt x="354444" y="18727"/>
+                  </a:lnTo>
+                  <a:lnTo>
+                    <a:pt x="443055" y="23409"/>
+                  </a:lnTo>
+                  <a:lnTo>
+                    <a:pt x="531666" y="28091"/>
+                  </a:lnTo>
+                  <a:lnTo>
+                    <a:pt x="620277" y="32773"/>
+                  </a:lnTo>
+                  <a:lnTo>
+                    <a:pt x="708888" y="37455"/>
+                  </a:lnTo>
+                  <a:lnTo>
+                    <a:pt x="797499" y="42137"/>
+                  </a:lnTo>
+                  <a:lnTo>
+                    <a:pt x="886110" y="46819"/>
+                  </a:lnTo>
+                  <a:lnTo>
+                    <a:pt x="974721" y="51501"/>
+                  </a:lnTo>
+                  <a:lnTo>
+                    <a:pt x="1063332" y="56183"/>
+                  </a:lnTo>
+                  <a:lnTo>
+                    <a:pt x="1151943" y="60865"/>
+                  </a:lnTo>
+                  <a:lnTo>
+                    <a:pt x="1240554" y="65546"/>
+                  </a:lnTo>
+                  <a:lnTo>
+                    <a:pt x="1329165" y="70228"/>
+                  </a:lnTo>
+                  <a:lnTo>
+                    <a:pt x="1417776" y="74910"/>
+                  </a:lnTo>
+                  <a:lnTo>
+                    <a:pt x="1506387" y="79592"/>
+                  </a:lnTo>
+                  <a:lnTo>
+                    <a:pt x="1594998" y="84274"/>
+                  </a:lnTo>
+                  <a:lnTo>
+                    <a:pt x="1683609" y="88956"/>
+                  </a:lnTo>
+                  <a:lnTo>
+                    <a:pt x="1772220" y="93638"/>
+                  </a:lnTo>
+                  <a:lnTo>
+                    <a:pt x="1860831" y="98320"/>
+                  </a:lnTo>
+                  <a:lnTo>
+                    <a:pt x="1949442" y="103002"/>
+                  </a:lnTo>
+                  <a:lnTo>
+                    <a:pt x="2038053" y="107684"/>
+                  </a:lnTo>
+                  <a:lnTo>
+                    <a:pt x="2126664" y="112366"/>
+                  </a:lnTo>
+                  <a:lnTo>
+                    <a:pt x="2215275" y="117048"/>
+                  </a:lnTo>
+                  <a:lnTo>
+                    <a:pt x="2303886" y="121730"/>
+                  </a:lnTo>
+                  <a:lnTo>
+                    <a:pt x="2392497" y="126411"/>
+                  </a:lnTo>
+                  <a:lnTo>
+                    <a:pt x="2481108" y="131093"/>
+                  </a:lnTo>
+                  <a:lnTo>
+                    <a:pt x="2569719" y="135775"/>
+                  </a:lnTo>
+                  <a:lnTo>
+                    <a:pt x="2658330" y="140457"/>
+                  </a:lnTo>
+                  <a:lnTo>
+                    <a:pt x="2746941" y="145139"/>
+                  </a:lnTo>
+                  <a:lnTo>
+                    <a:pt x="2835552" y="149821"/>
+                  </a:lnTo>
+                  <a:lnTo>
+                    <a:pt x="2924163" y="154503"/>
+                  </a:lnTo>
+                  <a:lnTo>
+                    <a:pt x="3012774" y="159185"/>
+                  </a:lnTo>
+                  <a:lnTo>
+                    <a:pt x="3101385" y="163867"/>
+                  </a:lnTo>
+                  <a:lnTo>
+                    <a:pt x="3189996" y="168549"/>
+                  </a:lnTo>
+                  <a:lnTo>
+                    <a:pt x="3278607" y="173231"/>
+                  </a:lnTo>
+                  <a:lnTo>
+                    <a:pt x="3367218" y="177913"/>
+                  </a:lnTo>
+                  <a:lnTo>
+                    <a:pt x="3455829" y="182595"/>
+                  </a:lnTo>
+                  <a:lnTo>
+                    <a:pt x="3544440" y="187276"/>
+                  </a:lnTo>
+                  <a:lnTo>
+                    <a:pt x="3633051" y="191958"/>
+                  </a:lnTo>
+                  <a:lnTo>
+                    <a:pt x="3721662" y="196640"/>
+                  </a:lnTo>
+                  <a:lnTo>
+                    <a:pt x="3810273" y="201322"/>
+                  </a:lnTo>
+                  <a:lnTo>
+                    <a:pt x="3898884" y="206004"/>
+                  </a:lnTo>
+                  <a:lnTo>
+                    <a:pt x="3987495" y="210686"/>
+                  </a:lnTo>
+                  <a:lnTo>
+                    <a:pt x="4076107" y="215368"/>
+                  </a:lnTo>
+                  <a:lnTo>
+                    <a:pt x="4164718" y="220050"/>
+                  </a:lnTo>
+                  <a:lnTo>
+                    <a:pt x="4253329" y="224732"/>
+                  </a:lnTo>
+                  <a:lnTo>
+                    <a:pt x="4341940" y="229414"/>
+                  </a:lnTo>
+                  <a:lnTo>
+                    <a:pt x="4430551" y="234096"/>
+                  </a:lnTo>
+                  <a:lnTo>
+                    <a:pt x="4519162" y="238778"/>
+                  </a:lnTo>
+                  <a:lnTo>
+                    <a:pt x="4607773" y="243460"/>
+                  </a:lnTo>
+                  <a:lnTo>
+                    <a:pt x="4696384" y="248141"/>
+                  </a:lnTo>
+                  <a:lnTo>
+                    <a:pt x="4784995" y="252823"/>
+                  </a:lnTo>
+                  <a:lnTo>
+                    <a:pt x="4873606" y="257505"/>
+                  </a:lnTo>
+                  <a:lnTo>
+                    <a:pt x="4962217" y="262187"/>
+                  </a:lnTo>
+                  <a:lnTo>
+                    <a:pt x="5050828" y="266869"/>
+                  </a:lnTo>
+                  <a:lnTo>
+                    <a:pt x="5139439" y="271551"/>
+                  </a:lnTo>
+                  <a:lnTo>
+                    <a:pt x="5228050" y="276233"/>
+                  </a:lnTo>
+                  <a:lnTo>
+                    <a:pt x="5316661" y="280915"/>
+                  </a:lnTo>
+                  <a:lnTo>
+                    <a:pt x="5405272" y="285597"/>
+                  </a:lnTo>
+                  <a:lnTo>
+                    <a:pt x="5493883" y="290279"/>
+                  </a:lnTo>
+                  <a:lnTo>
+                    <a:pt x="5582494" y="294961"/>
+                  </a:lnTo>
+                  <a:lnTo>
+                    <a:pt x="5671105" y="299643"/>
+                  </a:lnTo>
+                  <a:lnTo>
+                    <a:pt x="5759716" y="304325"/>
+                  </a:lnTo>
+                  <a:lnTo>
+                    <a:pt x="5848327" y="309006"/>
+                  </a:lnTo>
+                  <a:lnTo>
+                    <a:pt x="5936938" y="313688"/>
+                  </a:lnTo>
+                  <a:lnTo>
+                    <a:pt x="6025549" y="318370"/>
+                  </a:lnTo>
+                  <a:lnTo>
+                    <a:pt x="6114160" y="323052"/>
+                  </a:lnTo>
+                  <a:lnTo>
+                    <a:pt x="6202771" y="327734"/>
+                  </a:lnTo>
+                  <a:lnTo>
+                    <a:pt x="6291382" y="332416"/>
+                  </a:lnTo>
+                  <a:lnTo>
+                    <a:pt x="6379993" y="337098"/>
+                  </a:lnTo>
+                  <a:lnTo>
+                    <a:pt x="6468604" y="341780"/>
+                  </a:lnTo>
+                  <a:lnTo>
+                    <a:pt x="6557215" y="346462"/>
+                  </a:lnTo>
+                  <a:lnTo>
+                    <a:pt x="6645826" y="351144"/>
+                  </a:lnTo>
+                  <a:lnTo>
+                    <a:pt x="6734437" y="355826"/>
+                  </a:lnTo>
+                  <a:lnTo>
+                    <a:pt x="6823048" y="360508"/>
+                  </a:lnTo>
+                  <a:lnTo>
+                    <a:pt x="6911659" y="365190"/>
+                  </a:lnTo>
+                  <a:lnTo>
+                    <a:pt x="7000270" y="369871"/>
                   </a:lnTo>
                 </a:path>
               </a:pathLst>
@@ -15530,7 +15495,7 @@
         </p:sp>
         <p:sp>
           <p:nvSpPr>
-            <p:cNvPr id="346" name="pl346"/>
+            <p:cNvPr id="345" name="pl345"/>
             <p:cNvSpPr/>
             <p:nvPr/>
           </p:nvSpPr>
@@ -15573,7 +15538,7 @@
         </p:sp>
         <p:sp>
           <p:nvSpPr>
-            <p:cNvPr id="347" name="tx347"/>
+            <p:cNvPr id="346" name="tx346"/>
             <p:cNvSpPr/>
             <p:nvPr/>
           </p:nvSpPr>
@@ -15619,7 +15584,7 @@
         </p:sp>
         <p:sp>
           <p:nvSpPr>
-            <p:cNvPr id="348" name="tx348"/>
+            <p:cNvPr id="347" name="tx347"/>
             <p:cNvSpPr/>
             <p:nvPr/>
           </p:nvSpPr>
@@ -15665,7 +15630,7 @@
         </p:sp>
         <p:sp>
           <p:nvSpPr>
-            <p:cNvPr id="349" name="tx349"/>
+            <p:cNvPr id="348" name="tx348"/>
             <p:cNvSpPr/>
             <p:nvPr/>
           </p:nvSpPr>
@@ -15711,7 +15676,7 @@
         </p:sp>
         <p:sp>
           <p:nvSpPr>
-            <p:cNvPr id="350" name="tx350"/>
+            <p:cNvPr id="349" name="tx349"/>
             <p:cNvSpPr/>
             <p:nvPr/>
           </p:nvSpPr>
@@ -15757,7 +15722,7 @@
         </p:sp>
         <p:sp>
           <p:nvSpPr>
-            <p:cNvPr id="351" name="tx351"/>
+            <p:cNvPr id="350" name="tx350"/>
             <p:cNvSpPr/>
             <p:nvPr/>
           </p:nvSpPr>
@@ -15803,7 +15768,7 @@
         </p:sp>
         <p:sp>
           <p:nvSpPr>
-            <p:cNvPr id="352" name="tx352"/>
+            <p:cNvPr id="351" name="tx351"/>
             <p:cNvSpPr/>
             <p:nvPr/>
           </p:nvSpPr>
@@ -15849,7 +15814,7 @@
         </p:sp>
         <p:sp>
           <p:nvSpPr>
-            <p:cNvPr id="353" name="tx353"/>
+            <p:cNvPr id="352" name="tx352"/>
             <p:cNvSpPr/>
             <p:nvPr/>
           </p:nvSpPr>
@@ -15895,7 +15860,7 @@
         </p:sp>
         <p:sp>
           <p:nvSpPr>
-            <p:cNvPr id="354" name="tx354"/>
+            <p:cNvPr id="353" name="tx353"/>
             <p:cNvSpPr/>
             <p:nvPr/>
           </p:nvSpPr>
@@ -15941,7 +15906,7 @@
         </p:sp>
         <p:sp>
           <p:nvSpPr>
-            <p:cNvPr id="355" name="tx355"/>
+            <p:cNvPr id="354" name="tx354"/>
             <p:cNvSpPr/>
             <p:nvPr/>
           </p:nvSpPr>
@@ -15987,7 +15952,7 @@
         </p:sp>
         <p:sp>
           <p:nvSpPr>
-            <p:cNvPr id="356" name="tx356"/>
+            <p:cNvPr id="355" name="tx355"/>
             <p:cNvSpPr/>
             <p:nvPr/>
           </p:nvSpPr>
